--- a/PPT/8. ReactJS - Hook_Form.pptx
+++ b/PPT/8. ReactJS - Hook_Form.pptx
@@ -4,6 +4,9 @@
   <p:sldMasterIdLst>
     <p:sldMasterId id="2147483648" r:id="rId1"/>
   </p:sldMasterIdLst>
+  <p:notesMasterIdLst>
+    <p:notesMasterId r:id="rId18"/>
+  </p:notesMasterIdLst>
   <p:sldIdLst>
     <p:sldId id="256" r:id="rId2"/>
     <p:sldId id="257" r:id="rId3"/>
@@ -22,9 +25,6 @@
     <p:sldId id="270" r:id="rId16"/>
     <p:sldId id="271" r:id="rId17"/>
   </p:sldIdLst>
-  <p:notesMasterIdLst>
-    <p:notesMasterId r:id="rId18"/>
-  </p:notesMasterIdLst>
   <p:sldSz cx="12192000" cy="6858000"/>
   <p:notesSz cx="6858000" cy="12192000"/>
   <p:defaultTextStyle>
@@ -119,6 +119,11 @@
       </a:defRPr>
     </a:lvl9pPr>
   </p:defaultTextStyle>
+  <p:extLst>
+    <p:ext uri="{EFAFB233-063F-42B5-8137-9DF3F51BA10A}">
+      <p15:sldGuideLst xmlns:p15="http://schemas.microsoft.com/office/powerpoint/2012/main"/>
+    </p:ext>
+  </p:extLst>
 </p:presentation>
 </file>
 
@@ -144,234 +149,10 @@
           <a:chExt cx="0" cy="0"/>
         </a:xfrm>
       </p:grpSpPr>
-      <p:sp>
-        <p:nvSpPr>
-          <p:cNvPr id="2" name="Header Placeholder 1"/>
-          <p:cNvSpPr>
-            <a:spLocks noGrp="1"/>
-          </p:cNvSpPr>
-          <p:nvPr>
-            <p:ph type="hdr" sz="quarter"/>
-          </p:nvPr>
-        </p:nvSpPr>
-        <p:spPr>
-          <a:xfrm>
-            <a:off x="0" y="0"/>
-            <a:ext cx="2971800" cy="458788"/>
-          </a:xfrm>
-          <a:prstGeom prst="rect">
-            <a:avLst/>
-          </a:prstGeom>
-        </p:spPr>
-        <p:txBody>
-          <a:bodyPr vert="horz" lIns="91440" tIns="45720" rIns="91440" bIns="45720" rtlCol="0"/>
-          <a:lstStyle>
-            <a:lvl1pPr algn="l">
-              <a:defRPr sz="1200"/>
-            </a:lvl1pPr>
-          </a:lstStyle>
-          <a:p>
-            <a:endParaRPr lang="en-US"/>
-          </a:p>
-        </p:txBody>
-      </p:sp>
-      <p:sp>
-        <p:nvSpPr>
-          <p:cNvPr id="3" name="Date Placeholder 2"/>
-          <p:cNvSpPr>
-            <a:spLocks noGrp="1"/>
-          </p:cNvSpPr>
-          <p:nvPr>
-            <p:ph type="dt" idx="1"/>
-          </p:nvPr>
-        </p:nvSpPr>
-        <p:spPr>
-          <a:xfrm>
-            <a:off x="3884613" y="0"/>
-            <a:ext cx="2971800" cy="458788"/>
-          </a:xfrm>
-          <a:prstGeom prst="rect">
-            <a:avLst/>
-          </a:prstGeom>
-        </p:spPr>
-        <p:txBody>
-          <a:bodyPr vert="horz" lIns="91440" tIns="45720" rIns="91440" bIns="45720" rtlCol="0"/>
-          <a:lstStyle>
-            <a:lvl1pPr algn="r">
-              <a:defRPr sz="1200"/>
-            </a:lvl1pPr>
-          </a:lstStyle>
-          <a:p>
-            <a:fld id="{5282F153-3F37-0F45-9E97-73ACFA13230C}" type="datetimeFigureOut">
-              <a:rPr lang="en-US"/>
-              <a:t>7/23/19</a:t>
-            </a:fld>
-            <a:endParaRPr lang="en-US"/>
-          </a:p>
-        </p:txBody>
-      </p:sp>
-      <p:sp>
-        <p:nvSpPr>
-          <p:cNvPr id="4" name="Slide Image Placeholder 3"/>
-          <p:cNvSpPr>
-            <a:spLocks noGrp="1" noRot="1" noChangeAspect="1"/>
-          </p:cNvSpPr>
-          <p:nvPr>
-            <p:ph type="sldImg" idx="2"/>
-          </p:nvPr>
-        </p:nvSpPr>
-        <p:spPr>
-          <a:xfrm>
-            <a:off x="685800" y="1143000"/>
-            <a:ext cx="5486400" cy="3086100"/>
-          </a:xfrm>
-          <a:prstGeom prst="rect">
-            <a:avLst/>
-          </a:prstGeom>
-          <a:noFill/>
-          <a:ln w="12700">
-            <a:solidFill>
-              <a:prstClr val="black"/>
-            </a:solidFill>
-          </a:ln>
-        </p:spPr>
-        <p:txBody>
-          <a:bodyPr vert="horz" lIns="91440" tIns="45720" rIns="91440" bIns="45720" rtlCol="0" anchor="ctr"/>
-          <a:lstStyle/>
-          <a:p>
-            <a:endParaRPr lang="en-US"/>
-          </a:p>
-        </p:txBody>
-      </p:sp>
-      <p:sp>
-        <p:nvSpPr>
-          <p:cNvPr id="5" name="Notes Placeholder 4"/>
-          <p:cNvSpPr>
-            <a:spLocks noGrp="1"/>
-          </p:cNvSpPr>
-          <p:nvPr>
-            <p:ph type="body" sz="quarter" idx="3"/>
-          </p:nvPr>
-        </p:nvSpPr>
-        <p:spPr>
-          <a:xfrm>
-            <a:off x="685800" y="4400550"/>
-            <a:ext cx="5486400" cy="3600450"/>
-          </a:xfrm>
-          <a:prstGeom prst="rect">
-            <a:avLst/>
-          </a:prstGeom>
-        </p:spPr>
-        <p:txBody>
-          <a:bodyPr vert="horz" lIns="91440" tIns="45720" rIns="91440" bIns="45720" rtlCol="0"/>
-          <a:lstStyle/>
-          <a:p>
-            <a:pPr lvl="0"/>
-            <a:r>
-              <a:rPr lang="en-US"/>
-              <a:t>Click to edit Master text styles</a:t>
-            </a:r>
-          </a:p>
-          <a:p>
-            <a:pPr lvl="1"/>
-            <a:r>
-              <a:rPr lang="en-US"/>
-              <a:t>Second level</a:t>
-            </a:r>
-          </a:p>
-          <a:p>
-            <a:pPr lvl="2"/>
-            <a:r>
-              <a:rPr lang="en-US"/>
-              <a:t>Third level</a:t>
-            </a:r>
-          </a:p>
-          <a:p>
-            <a:pPr lvl="3"/>
-            <a:r>
-              <a:rPr lang="en-US"/>
-              <a:t>Fourth level</a:t>
-            </a:r>
-          </a:p>
-          <a:p>
-            <a:pPr lvl="4"/>
-            <a:r>
-              <a:rPr lang="en-US"/>
-              <a:t>Fifth level</a:t>
-            </a:r>
-          </a:p>
-        </p:txBody>
-      </p:sp>
-      <p:sp>
-        <p:nvSpPr>
-          <p:cNvPr id="6" name="Footer Placeholder 5"/>
-          <p:cNvSpPr>
-            <a:spLocks noGrp="1"/>
-          </p:cNvSpPr>
-          <p:nvPr>
-            <p:ph type="ftr" sz="quarter" idx="4"/>
-          </p:nvPr>
-        </p:nvSpPr>
-        <p:spPr>
-          <a:xfrm>
-            <a:off x="0" y="8685213"/>
-            <a:ext cx="2971800" cy="458787"/>
-          </a:xfrm>
-          <a:prstGeom prst="rect">
-            <a:avLst/>
-          </a:prstGeom>
-        </p:spPr>
-        <p:txBody>
-          <a:bodyPr vert="horz" lIns="91440" tIns="45720" rIns="91440" bIns="45720" rtlCol="0" anchor="b"/>
-          <a:lstStyle>
-            <a:lvl1pPr algn="l">
-              <a:defRPr sz="1200"/>
-            </a:lvl1pPr>
-          </a:lstStyle>
-          <a:p>
-            <a:endParaRPr lang="en-US"/>
-          </a:p>
-        </p:txBody>
-      </p:sp>
-      <p:sp>
-        <p:nvSpPr>
-          <p:cNvPr id="7" name="Slide Number Placeholder 6"/>
-          <p:cNvSpPr>
-            <a:spLocks noGrp="1"/>
-          </p:cNvSpPr>
-          <p:nvPr>
-            <p:ph type="sldNum" sz="quarter" idx="5"/>
-          </p:nvPr>
-        </p:nvSpPr>
-        <p:spPr>
-          <a:xfrm>
-            <a:off x="3884613" y="8685213"/>
-            <a:ext cx="2971800" cy="458787"/>
-          </a:xfrm>
-          <a:prstGeom prst="rect">
-            <a:avLst/>
-          </a:prstGeom>
-        </p:spPr>
-        <p:txBody>
-          <a:bodyPr vert="horz" lIns="91440" tIns="45720" rIns="91440" bIns="45720" rtlCol="0" anchor="b"/>
-          <a:lstStyle>
-            <a:lvl1pPr algn="r">
-              <a:defRPr sz="1200"/>
-            </a:lvl1pPr>
-          </a:lstStyle>
-          <a:p>
-            <a:fld id="{CE5E9CC1-C706-0F49-92D6-E571CC5EEA8F}" type="slidenum">
-              <a:rPr lang="en-US"/>
-              <a:t>‹#›</a:t>
-            </a:fld>
-            <a:endParaRPr lang="en-US"/>
-          </a:p>
-        </p:txBody>
-      </p:sp>
     </p:spTree>
     <p:extLst>
       <p:ext uri="{BB962C8B-B14F-4D97-AF65-F5344CB8AC3E}">
-        <p14:creationId xmlns:p14="http://schemas.microsoft.com/office/powerpoint/2010/main" val="1024086991"/>
+        <p14:creationId xmlns:p14="http://schemas.microsoft.com/office/powerpoint/2010/main" val="1915965025"/>
       </p:ext>
     </p:extLst>
   </p:cSld>
@@ -515,10 +296,6 @@
           <a:bodyPr/>
           <a:lstStyle/>
           <a:p>
-            <a:r>
-              <a:rPr lang="en-US" dirty="0"/>
-              <a:t/>
-            </a:r>
             <a:endParaRPr lang="en-US" dirty="0"/>
           </a:p>
         </p:txBody>
@@ -603,10 +380,6 @@
           <a:bodyPr/>
           <a:lstStyle/>
           <a:p>
-            <a:r>
-              <a:rPr lang="en-US" dirty="0"/>
-              <a:t/>
-            </a:r>
             <a:endParaRPr lang="en-US" dirty="0"/>
           </a:p>
         </p:txBody>
@@ -691,10 +464,6 @@
           <a:bodyPr/>
           <a:lstStyle/>
           <a:p>
-            <a:r>
-              <a:rPr lang="en-US" dirty="0"/>
-              <a:t/>
-            </a:r>
             <a:endParaRPr lang="en-US" dirty="0"/>
           </a:p>
         </p:txBody>
@@ -779,10 +548,6 @@
           <a:bodyPr/>
           <a:lstStyle/>
           <a:p>
-            <a:r>
-              <a:rPr lang="en-US" dirty="0"/>
-              <a:t/>
-            </a:r>
             <a:endParaRPr lang="en-US" dirty="0"/>
           </a:p>
         </p:txBody>
@@ -867,10 +632,6 @@
           <a:bodyPr/>
           <a:lstStyle/>
           <a:p>
-            <a:r>
-              <a:rPr lang="en-US" dirty="0"/>
-              <a:t/>
-            </a:r>
             <a:endParaRPr lang="en-US" dirty="0"/>
           </a:p>
         </p:txBody>
@@ -955,10 +716,6 @@
           <a:bodyPr/>
           <a:lstStyle/>
           <a:p>
-            <a:r>
-              <a:rPr lang="en-US" dirty="0"/>
-              <a:t/>
-            </a:r>
             <a:endParaRPr lang="en-US" dirty="0"/>
           </a:p>
         </p:txBody>
@@ -1043,10 +800,6 @@
           <a:bodyPr/>
           <a:lstStyle/>
           <a:p>
-            <a:r>
-              <a:rPr lang="en-US" dirty="0"/>
-              <a:t/>
-            </a:r>
             <a:endParaRPr lang="en-US" dirty="0"/>
           </a:p>
         </p:txBody>
@@ -1131,10 +884,6 @@
           <a:bodyPr/>
           <a:lstStyle/>
           <a:p>
-            <a:r>
-              <a:rPr lang="en-US" dirty="0"/>
-              <a:t/>
-            </a:r>
             <a:endParaRPr lang="en-US" dirty="0"/>
           </a:p>
         </p:txBody>
@@ -1219,10 +968,6 @@
           <a:bodyPr/>
           <a:lstStyle/>
           <a:p>
-            <a:r>
-              <a:rPr lang="en-US" dirty="0"/>
-              <a:t/>
-            </a:r>
             <a:endParaRPr lang="en-US" dirty="0"/>
           </a:p>
         </p:txBody>
@@ -1307,10 +1052,6 @@
           <a:bodyPr/>
           <a:lstStyle/>
           <a:p>
-            <a:r>
-              <a:rPr lang="en-US" dirty="0"/>
-              <a:t/>
-            </a:r>
             <a:endParaRPr lang="en-US" dirty="0"/>
           </a:p>
         </p:txBody>
@@ -1395,10 +1136,6 @@
           <a:bodyPr/>
           <a:lstStyle/>
           <a:p>
-            <a:r>
-              <a:rPr lang="en-US" dirty="0"/>
-              <a:t/>
-            </a:r>
             <a:endParaRPr lang="en-US" dirty="0"/>
           </a:p>
         </p:txBody>
@@ -1483,10 +1220,6 @@
           <a:bodyPr/>
           <a:lstStyle/>
           <a:p>
-            <a:r>
-              <a:rPr lang="en-US" dirty="0"/>
-              <a:t/>
-            </a:r>
             <a:endParaRPr lang="en-US" dirty="0"/>
           </a:p>
         </p:txBody>
@@ -1571,10 +1304,6 @@
           <a:bodyPr/>
           <a:lstStyle/>
           <a:p>
-            <a:r>
-              <a:rPr lang="en-US" dirty="0"/>
-              <a:t/>
-            </a:r>
             <a:endParaRPr lang="en-US" dirty="0"/>
           </a:p>
         </p:txBody>
@@ -1659,10 +1388,6 @@
           <a:bodyPr/>
           <a:lstStyle/>
           <a:p>
-            <a:r>
-              <a:rPr lang="en-US" dirty="0"/>
-              <a:t/>
-            </a:r>
             <a:endParaRPr lang="en-US" dirty="0"/>
           </a:p>
         </p:txBody>
@@ -1747,10 +1472,6 @@
           <a:bodyPr/>
           <a:lstStyle/>
           <a:p>
-            <a:r>
-              <a:rPr lang="en-US" dirty="0"/>
-              <a:t/>
-            </a:r>
             <a:endParaRPr lang="en-US" dirty="0"/>
           </a:p>
         </p:txBody>
@@ -1835,10 +1556,6 @@
           <a:bodyPr/>
           <a:lstStyle/>
           <a:p>
-            <a:r>
-              <a:rPr lang="en-US" dirty="0"/>
-              <a:t/>
-            </a:r>
             <a:endParaRPr lang="en-US" dirty="0"/>
           </a:p>
         </p:txBody>
@@ -1912,6 +1629,11 @@
 <file path=ppt/slideMasters/slideMaster1.xml><?xml version="1.0" encoding="utf-8"?>
 <p:sldMaster xmlns:a="http://schemas.openxmlformats.org/drawingml/2006/main" xmlns:r="http://schemas.openxmlformats.org/officeDocument/2006/relationships" xmlns:p="http://schemas.openxmlformats.org/presentationml/2006/main">
   <p:cSld>
+    <p:bg>
+      <p:bgRef idx="1001">
+        <a:schemeClr val="bg1"/>
+      </p:bgRef>
+    </p:bg>
     <p:spTree>
       <p:nvGrpSpPr>
         <p:cNvPr id="1" name=""/>
@@ -2194,6 +1916,7 @@
         <a:solidFill>
           <a:srgbClr val="1B1F3B"/>
         </a:solidFill>
+        <a:effectLst/>
       </p:bgPr>
     </p:bg>
     <p:spTree>
@@ -2231,7 +1954,7 @@
           <a:bodyPr wrap="square" lIns="0" tIns="0" rIns="0" bIns="0" rtlCol="0" anchor="ctr"/>
           <a:lstStyle/>
           <a:p>
-            <a:pPr algn="ctr" indent="0" marL="0">
+            <a:pPr marL="0" indent="0" algn="ctr">
               <a:buNone/>
             </a:pPr>
             <a:r>
@@ -2270,11 +1993,11 @@
           <a:bodyPr wrap="square" lIns="0" tIns="0" rIns="0" bIns="0" rtlCol="0" anchor="ctr"/>
           <a:lstStyle/>
           <a:p>
-            <a:pPr indent="0" marL="0">
-              <a:buNone/>
-            </a:pPr>
-            <a:r>
-              <a:rPr lang="en-US" sz="1400" b="1" spc="200" kern="0" dirty="0">
+            <a:pPr marL="0" indent="0">
+              <a:buNone/>
+            </a:pPr>
+            <a:r>
+              <a:rPr lang="en-US" sz="1400" b="1" kern="0" spc="200" dirty="0">
                 <a:solidFill>
                   <a:srgbClr val="61DAFB"/>
                 </a:solidFill>
@@ -2309,7 +2032,7 @@
           <a:bodyPr wrap="square" lIns="0" tIns="0" rIns="0" bIns="0" rtlCol="0" anchor="ctr"/>
           <a:lstStyle/>
           <a:p>
-            <a:pPr indent="0" marL="0">
+            <a:pPr marL="0" indent="0">
               <a:buNone/>
             </a:pPr>
             <a:r>
@@ -2348,7 +2071,7 @@
           <a:bodyPr wrap="square" lIns="0" tIns="0" rIns="0" bIns="0" rtlCol="0" anchor="ctr"/>
           <a:lstStyle/>
           <a:p>
-            <a:pPr indent="0" marL="0">
+            <a:pPr marL="0" indent="0">
               <a:lnSpc>
                 <a:spcPct val="130000"/>
               </a:lnSpc>
@@ -2368,7 +2091,7 @@
             <a:endParaRPr lang="en-US" sz="1600" dirty="0"/>
           </a:p>
           <a:p>
-            <a:pPr indent="0" marL="0">
+            <a:pPr marL="0" indent="0">
               <a:lnSpc>
                 <a:spcPct val="130000"/>
               </a:lnSpc>
@@ -2437,7 +2160,7 @@
           <a:bodyPr wrap="square" lIns="0" tIns="0" rIns="0" bIns="0" rtlCol="0" anchor="ctr"/>
           <a:lstStyle/>
           <a:p>
-            <a:pPr algn="ctr" indent="0" marL="0">
+            <a:pPr marL="0" indent="0" algn="ctr">
               <a:buNone/>
             </a:pPr>
             <a:r>
@@ -2503,7 +2226,7 @@
           <a:bodyPr wrap="square" lIns="0" tIns="0" rIns="0" bIns="0" rtlCol="0" anchor="ctr"/>
           <a:lstStyle/>
           <a:p>
-            <a:pPr algn="ctr" indent="0" marL="0">
+            <a:pPr marL="0" indent="0" algn="ctr">
               <a:buNone/>
             </a:pPr>
             <a:r>
@@ -2569,7 +2292,7 @@
           <a:bodyPr wrap="square" lIns="0" tIns="0" rIns="0" bIns="0" rtlCol="0" anchor="ctr"/>
           <a:lstStyle/>
           <a:p>
-            <a:pPr algn="ctr" indent="0" marL="0">
+            <a:pPr marL="0" indent="0" algn="ctr">
               <a:buNone/>
             </a:pPr>
             <a:r>
@@ -2635,7 +2358,7 @@
           <a:bodyPr wrap="square" lIns="0" tIns="0" rIns="0" bIns="0" rtlCol="0" anchor="ctr"/>
           <a:lstStyle/>
           <a:p>
-            <a:pPr algn="ctr" indent="0" marL="0">
+            <a:pPr marL="0" indent="0" algn="ctr">
               <a:buNone/>
             </a:pPr>
             <a:r>
@@ -2669,6 +2392,7 @@
         <a:solidFill>
           <a:srgbClr val="FFFFFF"/>
         </a:solidFill>
+        <a:effectLst/>
       </p:bgPr>
     </p:bg>
     <p:spTree>
@@ -2706,11 +2430,11 @@
           <a:bodyPr wrap="square" lIns="0" tIns="0" rIns="0" bIns="0" rtlCol="0" anchor="ctr"/>
           <a:lstStyle/>
           <a:p>
-            <a:pPr indent="0" marL="0">
-              <a:buNone/>
-            </a:pPr>
-            <a:r>
-              <a:rPr lang="en-US" sz="1200" b="1" spc="150" kern="0" dirty="0">
+            <a:pPr marL="0" indent="0">
+              <a:buNone/>
+            </a:pPr>
+            <a:r>
+              <a:rPr lang="en-US" sz="1200" b="1" kern="0" spc="150" dirty="0">
                 <a:solidFill>
                   <a:srgbClr val="1C7293"/>
                 </a:solidFill>
@@ -2745,7 +2469,7 @@
           <a:bodyPr wrap="square" lIns="0" tIns="0" rIns="0" bIns="0" rtlCol="0" anchor="ctr"/>
           <a:lstStyle/>
           <a:p>
-            <a:pPr indent="0" marL="0">
+            <a:pPr marL="0" indent="0">
               <a:buNone/>
             </a:pPr>
             <a:r>
@@ -2806,7 +2530,7 @@
           <a:bodyPr wrap="square" lIns="0" tIns="0" rIns="0" bIns="0" rtlCol="0" anchor="ctr"/>
           <a:lstStyle/>
           <a:p>
-            <a:pPr indent="0" marL="0">
+            <a:pPr marL="0" indent="0">
               <a:buNone/>
             </a:pPr>
             <a:r>
@@ -2850,7 +2574,7 @@
             <a:prstDash val="solid"/>
           </a:ln>
           <a:effectLst>
-            <a:outerShdw sx="100000" sy="100000" kx="0" ky="0" algn="bl" rotWithShape="0" blurRad="101600" dist="38100" dir="5400000">
+            <a:outerShdw blurRad="101600" dist="38100" dir="5400000" algn="bl" rotWithShape="0">
               <a:srgbClr val="000000">
                 <a:alpha val="25000"/>
               </a:srgbClr>
@@ -2879,7 +2603,7 @@
           <a:bodyPr wrap="square" lIns="0" tIns="0" rIns="0" bIns="0" rtlCol="0" anchor="t"/>
           <a:lstStyle/>
           <a:p>
-            <a:pPr indent="0" marL="0">
+            <a:pPr marL="0" indent="0">
               <a:lnSpc>
                 <a:spcPct val="115000"/>
               </a:lnSpc>
@@ -2921,7 +2645,7 @@
           <a:bodyPr wrap="square" lIns="0" tIns="0" rIns="0" bIns="0" rtlCol="0" anchor="ctr"/>
           <a:lstStyle/>
           <a:p>
-            <a:pPr indent="0" marL="0">
+            <a:pPr marL="0" indent="0">
               <a:buNone/>
             </a:pPr>
             <a:r>
@@ -2982,7 +2706,7 @@
           <a:bodyPr wrap="square" lIns="0" tIns="0" rIns="0" bIns="0" rtlCol="0" anchor="ctr"/>
           <a:lstStyle/>
           <a:p>
-            <a:pPr indent="0" marL="0">
+            <a:pPr marL="0" indent="0">
               <a:buNone/>
             </a:pPr>
             <a:r>
@@ -3026,7 +2750,7 @@
             <a:prstDash val="solid"/>
           </a:ln>
           <a:effectLst>
-            <a:outerShdw sx="100000" sy="100000" kx="0" ky="0" algn="bl" rotWithShape="0" blurRad="101600" dist="38100" dir="5400000">
+            <a:outerShdw blurRad="101600" dist="38100" dir="5400000" algn="bl" rotWithShape="0">
               <a:srgbClr val="000000">
                 <a:alpha val="25000"/>
               </a:srgbClr>
@@ -3055,7 +2779,7 @@
           <a:bodyPr wrap="square" lIns="0" tIns="0" rIns="0" bIns="0" rtlCol="0" anchor="t"/>
           <a:lstStyle/>
           <a:p>
-            <a:pPr indent="0" marL="0">
+            <a:pPr marL="0" indent="0">
               <a:lnSpc>
                 <a:spcPct val="115000"/>
               </a:lnSpc>
@@ -3097,7 +2821,7 @@
           <a:bodyPr wrap="square" lIns="0" tIns="0" rIns="0" bIns="0" rtlCol="0" anchor="ctr"/>
           <a:lstStyle/>
           <a:p>
-            <a:pPr indent="0" marL="0">
+            <a:pPr marL="0" indent="0">
               <a:buNone/>
             </a:pPr>
             <a:r>
@@ -3158,7 +2882,7 @@
           <a:bodyPr wrap="square" lIns="0" tIns="0" rIns="0" bIns="0" rtlCol="0" anchor="ctr"/>
           <a:lstStyle/>
           <a:p>
-            <a:pPr indent="0" marL="0">
+            <a:pPr marL="0" indent="0">
               <a:buNone/>
             </a:pPr>
             <a:r>
@@ -3202,7 +2926,7 @@
             <a:prstDash val="solid"/>
           </a:ln>
           <a:effectLst>
-            <a:outerShdw sx="100000" sy="100000" kx="0" ky="0" algn="bl" rotWithShape="0" blurRad="101600" dist="38100" dir="5400000">
+            <a:outerShdw blurRad="101600" dist="38100" dir="5400000" algn="bl" rotWithShape="0">
               <a:srgbClr val="000000">
                 <a:alpha val="25000"/>
               </a:srgbClr>
@@ -3231,7 +2955,7 @@
           <a:bodyPr wrap="square" lIns="0" tIns="0" rIns="0" bIns="0" rtlCol="0" anchor="t"/>
           <a:lstStyle/>
           <a:p>
-            <a:pPr indent="0" marL="0">
+            <a:pPr marL="0" indent="0">
               <a:lnSpc>
                 <a:spcPct val="115000"/>
               </a:lnSpc>
@@ -3273,7 +2997,7 @@
           <a:bodyPr wrap="square" lIns="0" tIns="0" rIns="0" bIns="0" rtlCol="0" anchor="ctr"/>
           <a:lstStyle/>
           <a:p>
-            <a:pPr indent="0" marL="0">
+            <a:pPr marL="0" indent="0">
               <a:buNone/>
             </a:pPr>
             <a:r>
@@ -3334,7 +3058,7 @@
           <a:bodyPr wrap="square" lIns="0" tIns="0" rIns="0" bIns="0" rtlCol="0" anchor="ctr"/>
           <a:lstStyle/>
           <a:p>
-            <a:pPr indent="0" marL="0">
+            <a:pPr marL="0" indent="0">
               <a:buNone/>
             </a:pPr>
             <a:r>
@@ -3378,7 +3102,7 @@
             <a:prstDash val="solid"/>
           </a:ln>
           <a:effectLst>
-            <a:outerShdw sx="100000" sy="100000" kx="0" ky="0" algn="bl" rotWithShape="0" blurRad="101600" dist="38100" dir="5400000">
+            <a:outerShdw blurRad="101600" dist="38100" dir="5400000" algn="bl" rotWithShape="0">
               <a:srgbClr val="000000">
                 <a:alpha val="25000"/>
               </a:srgbClr>
@@ -3407,7 +3131,7 @@
           <a:bodyPr wrap="square" lIns="0" tIns="0" rIns="0" bIns="0" rtlCol="0" anchor="t"/>
           <a:lstStyle/>
           <a:p>
-            <a:pPr indent="0" marL="0">
+            <a:pPr marL="0" indent="0">
               <a:lnSpc>
                 <a:spcPct val="115000"/>
               </a:lnSpc>
@@ -3449,7 +3173,7 @@
           <a:bodyPr wrap="square" lIns="0" tIns="0" rIns="0" bIns="0" rtlCol="0" anchor="ctr"/>
           <a:lstStyle/>
           <a:p>
-            <a:pPr indent="0" marL="0">
+            <a:pPr marL="0" indent="0">
               <a:buNone/>
             </a:pPr>
             <a:r>
@@ -3488,11 +3212,11 @@
           <a:bodyPr wrap="square" lIns="0" tIns="0" rIns="0" bIns="0" rtlCol="0" anchor="ctr"/>
           <a:lstStyle/>
           <a:p>
-            <a:pPr indent="0" marL="0">
-              <a:buNone/>
-            </a:pPr>
-            <a:r>
-              <a:rPr lang="en-US" sz="900" spc="100" kern="0" dirty="0">
+            <a:pPr marL="0" indent="0">
+              <a:buNone/>
+            </a:pPr>
+            <a:r>
+              <a:rPr lang="en-US" sz="900" kern="0" spc="100" dirty="0">
                 <a:solidFill>
                   <a:srgbClr val="A7AEC2"/>
                 </a:solidFill>
@@ -3527,7 +3251,7 @@
           <a:bodyPr wrap="square" lIns="0" tIns="0" rIns="0" bIns="0" rtlCol="0" anchor="ctr"/>
           <a:lstStyle/>
           <a:p>
-            <a:pPr algn="r" indent="0" marL="0">
+            <a:pPr marL="0" indent="0" algn="r">
               <a:buNone/>
             </a:pPr>
             <a:r>
@@ -3561,6 +3285,7 @@
         <a:solidFill>
           <a:srgbClr val="FFFFFF"/>
         </a:solidFill>
+        <a:effectLst/>
       </p:bgPr>
     </p:bg>
     <p:spTree>
@@ -3598,11 +3323,11 @@
           <a:bodyPr wrap="square" lIns="0" tIns="0" rIns="0" bIns="0" rtlCol="0" anchor="ctr"/>
           <a:lstStyle/>
           <a:p>
-            <a:pPr indent="0" marL="0">
-              <a:buNone/>
-            </a:pPr>
-            <a:r>
-              <a:rPr lang="en-US" sz="1200" b="1" spc="150" kern="0" dirty="0">
+            <a:pPr marL="0" indent="0">
+              <a:buNone/>
+            </a:pPr>
+            <a:r>
+              <a:rPr lang="en-US" sz="1200" b="1" kern="0" spc="150" dirty="0">
                 <a:solidFill>
                   <a:srgbClr val="1C7293"/>
                 </a:solidFill>
@@ -3637,7 +3362,7 @@
           <a:bodyPr wrap="square" lIns="0" tIns="0" rIns="0" bIns="0" rtlCol="0" anchor="ctr"/>
           <a:lstStyle/>
           <a:p>
-            <a:pPr indent="0" marL="0">
+            <a:pPr marL="0" indent="0">
               <a:buNone/>
             </a:pPr>
             <a:r>
@@ -3681,7 +3406,7 @@
             <a:prstDash val="solid"/>
           </a:ln>
           <a:effectLst>
-            <a:outerShdw sx="100000" sy="100000" kx="0" ky="0" algn="bl" rotWithShape="0" blurRad="101600" dist="38100" dir="5400000">
+            <a:outerShdw blurRad="101600" dist="38100" dir="5400000" algn="bl" rotWithShape="0">
               <a:srgbClr val="000000">
                 <a:alpha val="25000"/>
               </a:srgbClr>
@@ -3710,7 +3435,7 @@
           <a:bodyPr wrap="square" lIns="0" tIns="0" rIns="0" bIns="0" rtlCol="0" anchor="t"/>
           <a:lstStyle/>
           <a:p>
-            <a:pPr indent="0" marL="0">
+            <a:pPr marL="0" indent="0">
               <a:lnSpc>
                 <a:spcPct val="115000"/>
               </a:lnSpc>
@@ -3730,7 +3455,7 @@
             <a:endParaRPr lang="en-US" sz="1350" dirty="0"/>
           </a:p>
           <a:p>
-            <a:pPr indent="0" marL="0">
+            <a:pPr marL="0" indent="0">
               <a:lnSpc>
                 <a:spcPct val="115000"/>
               </a:lnSpc>
@@ -3750,7 +3475,7 @@
             <a:endParaRPr lang="en-US" sz="1350" dirty="0"/>
           </a:p>
           <a:p>
-            <a:pPr indent="0" marL="0">
+            <a:pPr marL="0" indent="0">
               <a:lnSpc>
                 <a:spcPct val="115000"/>
               </a:lnSpc>
@@ -3770,7 +3495,7 @@
             <a:endParaRPr lang="en-US" sz="1350" dirty="0"/>
           </a:p>
           <a:p>
-            <a:pPr indent="0" marL="0">
+            <a:pPr marL="0" indent="0">
               <a:lnSpc>
                 <a:spcPct val="115000"/>
               </a:lnSpc>
@@ -3817,7 +3542,7 @@
             <a:prstDash val="solid"/>
           </a:ln>
           <a:effectLst>
-            <a:outerShdw sx="100000" sy="100000" kx="0" ky="0" algn="bl" rotWithShape="0" blurRad="101600" dist="38100" dir="5400000">
+            <a:outerShdw blurRad="101600" dist="38100" dir="5400000" algn="bl" rotWithShape="0">
               <a:srgbClr val="000000">
                 <a:alpha val="25000"/>
               </a:srgbClr>
@@ -3846,7 +3571,7 @@
           <a:bodyPr wrap="square" lIns="0" tIns="0" rIns="0" bIns="0" rtlCol="0" anchor="t"/>
           <a:lstStyle/>
           <a:p>
-            <a:pPr indent="0" marL="0">
+            <a:pPr marL="0" indent="0">
               <a:lnSpc>
                 <a:spcPct val="115000"/>
               </a:lnSpc>
@@ -3866,7 +3591,7 @@
             <a:endParaRPr lang="en-US" sz="1400" dirty="0"/>
           </a:p>
           <a:p>
-            <a:pPr indent="0" marL="0">
+            <a:pPr marL="0" indent="0">
               <a:lnSpc>
                 <a:spcPct val="115000"/>
               </a:lnSpc>
@@ -3886,7 +3611,7 @@
             <a:endParaRPr lang="en-US" sz="1400" dirty="0"/>
           </a:p>
           <a:p>
-            <a:pPr indent="0" marL="0">
+            <a:pPr marL="0" indent="0">
               <a:lnSpc>
                 <a:spcPct val="115000"/>
               </a:lnSpc>
@@ -3950,7 +3675,7 @@
           <a:bodyPr wrap="square" lIns="0" tIns="0" rIns="0" bIns="0" rtlCol="0" anchor="ctr"/>
           <a:lstStyle/>
           <a:p>
-            <a:pPr algn="ctr" indent="0" marL="0">
+            <a:pPr marL="0" indent="0" algn="ctr">
               <a:buNone/>
             </a:pPr>
             <a:r>
@@ -4031,7 +3756,7 @@
           <a:bodyPr wrap="square" lIns="0" tIns="0" rIns="0" bIns="0" rtlCol="0" anchor="ctr"/>
           <a:lstStyle/>
           <a:p>
-            <a:pPr algn="ctr" indent="0" marL="0">
+            <a:pPr marL="0" indent="0" algn="ctr">
               <a:buNone/>
             </a:pPr>
             <a:r>
@@ -4112,7 +3837,7 @@
           <a:bodyPr wrap="square" lIns="0" tIns="0" rIns="0" bIns="0" rtlCol="0" anchor="ctr"/>
           <a:lstStyle/>
           <a:p>
-            <a:pPr algn="ctr" indent="0" marL="0">
+            <a:pPr marL="0" indent="0" algn="ctr">
               <a:buNone/>
             </a:pPr>
             <a:r>
@@ -4193,7 +3918,7 @@
           <a:bodyPr wrap="square" lIns="0" tIns="0" rIns="0" bIns="0" rtlCol="0" anchor="ctr"/>
           <a:lstStyle/>
           <a:p>
-            <a:pPr algn="ctr" indent="0" marL="0">
+            <a:pPr marL="0" indent="0" algn="ctr">
               <a:buNone/>
             </a:pPr>
             <a:r>
@@ -4274,7 +3999,7 @@
           <a:bodyPr wrap="square" lIns="0" tIns="0" rIns="0" bIns="0" rtlCol="0" anchor="ctr"/>
           <a:lstStyle/>
           <a:p>
-            <a:pPr algn="ctr" indent="0" marL="0">
+            <a:pPr marL="0" indent="0" algn="ctr">
               <a:buNone/>
             </a:pPr>
             <a:r>
@@ -4313,11 +4038,11 @@
           <a:bodyPr wrap="square" lIns="0" tIns="0" rIns="0" bIns="0" rtlCol="0" anchor="ctr"/>
           <a:lstStyle/>
           <a:p>
-            <a:pPr indent="0" marL="0">
-              <a:buNone/>
-            </a:pPr>
-            <a:r>
-              <a:rPr lang="en-US" sz="900" spc="100" kern="0" dirty="0">
+            <a:pPr marL="0" indent="0">
+              <a:buNone/>
+            </a:pPr>
+            <a:r>
+              <a:rPr lang="en-US" sz="900" kern="0" spc="100" dirty="0">
                 <a:solidFill>
                   <a:srgbClr val="A7AEC2"/>
                 </a:solidFill>
@@ -4352,7 +4077,7 @@
           <a:bodyPr wrap="square" lIns="0" tIns="0" rIns="0" bIns="0" rtlCol="0" anchor="ctr"/>
           <a:lstStyle/>
           <a:p>
-            <a:pPr algn="r" indent="0" marL="0">
+            <a:pPr marL="0" indent="0" algn="r">
               <a:buNone/>
             </a:pPr>
             <a:r>
@@ -4386,6 +4111,7 @@
         <a:solidFill>
           <a:srgbClr val="FFFFFF"/>
         </a:solidFill>
+        <a:effectLst/>
       </p:bgPr>
     </p:bg>
     <p:spTree>
@@ -4423,11 +4149,11 @@
           <a:bodyPr wrap="square" lIns="0" tIns="0" rIns="0" bIns="0" rtlCol="0" anchor="ctr"/>
           <a:lstStyle/>
           <a:p>
-            <a:pPr indent="0" marL="0">
-              <a:buNone/>
-            </a:pPr>
-            <a:r>
-              <a:rPr lang="en-US" sz="1200" b="1" spc="150" kern="0" dirty="0">
+            <a:pPr marL="0" indent="0">
+              <a:buNone/>
+            </a:pPr>
+            <a:r>
+              <a:rPr lang="en-US" sz="1200" b="1" kern="0" spc="150" dirty="0">
                 <a:solidFill>
                   <a:srgbClr val="1C7293"/>
                 </a:solidFill>
@@ -4462,7 +4188,7 @@
           <a:bodyPr wrap="square" lIns="0" tIns="0" rIns="0" bIns="0" rtlCol="0" anchor="ctr"/>
           <a:lstStyle/>
           <a:p>
-            <a:pPr indent="0" marL="0">
+            <a:pPr marL="0" indent="0">
               <a:buNone/>
             </a:pPr>
             <a:r>
@@ -4501,7 +4227,7 @@
           <a:bodyPr wrap="square" lIns="0" tIns="0" rIns="0" bIns="0" rtlCol="0" anchor="ctr"/>
           <a:lstStyle/>
           <a:p>
-            <a:pPr indent="0" marL="0">
+            <a:pPr marL="0" indent="0">
               <a:buNone/>
             </a:pPr>
             <a:r>
@@ -4545,7 +4271,7 @@
             <a:prstDash val="solid"/>
           </a:ln>
           <a:effectLst>
-            <a:outerShdw sx="100000" sy="100000" kx="0" ky="0" algn="bl" rotWithShape="0" blurRad="101600" dist="38100" dir="5400000">
+            <a:outerShdw blurRad="101600" dist="38100" dir="5400000" algn="bl" rotWithShape="0">
               <a:srgbClr val="000000">
                 <a:alpha val="25000"/>
               </a:srgbClr>
@@ -4574,7 +4300,7 @@
           <a:bodyPr wrap="square" lIns="0" tIns="0" rIns="0" bIns="0" rtlCol="0" anchor="t"/>
           <a:lstStyle/>
           <a:p>
-            <a:pPr indent="0" marL="0">
+            <a:pPr marL="0" indent="0">
               <a:lnSpc>
                 <a:spcPct val="115000"/>
               </a:lnSpc>
@@ -4594,7 +4320,7 @@
             <a:endParaRPr lang="en-US" sz="1250" dirty="0"/>
           </a:p>
           <a:p>
-            <a:pPr indent="0" marL="0">
+            <a:pPr marL="0" indent="0">
               <a:lnSpc>
                 <a:spcPct val="115000"/>
               </a:lnSpc>
@@ -4614,7 +4340,7 @@
             <a:endParaRPr lang="en-US" sz="1250" dirty="0"/>
           </a:p>
           <a:p>
-            <a:pPr indent="0" marL="0">
+            <a:pPr marL="0" indent="0">
               <a:lnSpc>
                 <a:spcPct val="115000"/>
               </a:lnSpc>
@@ -4634,7 +4360,7 @@
             <a:endParaRPr lang="en-US" sz="1250" dirty="0"/>
           </a:p>
           <a:p>
-            <a:pPr indent="0" marL="0">
+            <a:pPr marL="0" indent="0">
               <a:lnSpc>
                 <a:spcPct val="115000"/>
               </a:lnSpc>
@@ -4654,7 +4380,7 @@
             <a:endParaRPr lang="en-US" sz="1250" dirty="0"/>
           </a:p>
           <a:p>
-            <a:pPr indent="0" marL="0">
+            <a:pPr marL="0" indent="0">
               <a:lnSpc>
                 <a:spcPct val="115000"/>
               </a:lnSpc>
@@ -4696,7 +4422,7 @@
           <a:bodyPr wrap="square" lIns="0" tIns="0" rIns="0" bIns="0" rtlCol="0" anchor="ctr"/>
           <a:lstStyle/>
           <a:p>
-            <a:pPr indent="0" marL="0">
+            <a:pPr marL="0" indent="0">
               <a:buNone/>
             </a:pPr>
             <a:r>
@@ -4740,7 +4466,7 @@
             <a:prstDash val="solid"/>
           </a:ln>
           <a:effectLst>
-            <a:outerShdw sx="100000" sy="100000" kx="0" ky="0" algn="bl" rotWithShape="0" blurRad="101600" dist="38100" dir="5400000">
+            <a:outerShdw blurRad="101600" dist="38100" dir="5400000" algn="bl" rotWithShape="0">
               <a:srgbClr val="000000">
                 <a:alpha val="25000"/>
               </a:srgbClr>
@@ -4769,7 +4495,7 @@
           <a:bodyPr wrap="square" lIns="0" tIns="0" rIns="0" bIns="0" rtlCol="0" anchor="t"/>
           <a:lstStyle/>
           <a:p>
-            <a:pPr indent="0" marL="0">
+            <a:pPr marL="0" indent="0">
               <a:lnSpc>
                 <a:spcPct val="115000"/>
               </a:lnSpc>
@@ -4789,7 +4515,7 @@
             <a:endParaRPr lang="en-US" sz="1250" dirty="0"/>
           </a:p>
           <a:p>
-            <a:pPr indent="0" marL="0">
+            <a:pPr marL="0" indent="0">
               <a:lnSpc>
                 <a:spcPct val="115000"/>
               </a:lnSpc>
@@ -4809,7 +4535,7 @@
             <a:endParaRPr lang="en-US" sz="1250" dirty="0"/>
           </a:p>
           <a:p>
-            <a:pPr indent="0" marL="0">
+            <a:pPr marL="0" indent="0">
               <a:lnSpc>
                 <a:spcPct val="115000"/>
               </a:lnSpc>
@@ -4829,7 +4555,7 @@
             <a:endParaRPr lang="en-US" sz="1250" dirty="0"/>
           </a:p>
           <a:p>
-            <a:pPr indent="0" marL="0">
+            <a:pPr marL="0" indent="0">
               <a:lnSpc>
                 <a:spcPct val="115000"/>
               </a:lnSpc>
@@ -4871,7 +4597,7 @@
           <a:bodyPr wrap="square" lIns="0" tIns="0" rIns="0" bIns="0" rtlCol="0" anchor="ctr"/>
           <a:lstStyle/>
           <a:p>
-            <a:pPr indent="0" marL="0">
+            <a:pPr marL="0" indent="0">
               <a:buNone/>
             </a:pPr>
             <a:r>
@@ -4915,7 +4641,7 @@
             <a:prstDash val="solid"/>
           </a:ln>
           <a:effectLst>
-            <a:outerShdw sx="100000" sy="100000" kx="0" ky="0" algn="bl" rotWithShape="0" blurRad="101600" dist="38100" dir="5400000">
+            <a:outerShdw blurRad="101600" dist="38100" dir="5400000" algn="bl" rotWithShape="0">
               <a:srgbClr val="000000">
                 <a:alpha val="25000"/>
               </a:srgbClr>
@@ -4944,7 +4670,7 @@
           <a:bodyPr wrap="square" lIns="0" tIns="0" rIns="0" bIns="0" rtlCol="0" anchor="t"/>
           <a:lstStyle/>
           <a:p>
-            <a:pPr indent="0" marL="0">
+            <a:pPr marL="0" indent="0">
               <a:lnSpc>
                 <a:spcPct val="115000"/>
               </a:lnSpc>
@@ -4964,7 +4690,7 @@
             <a:endParaRPr lang="en-US" sz="1250" dirty="0"/>
           </a:p>
           <a:p>
-            <a:pPr indent="0" marL="0">
+            <a:pPr marL="0" indent="0">
               <a:lnSpc>
                 <a:spcPct val="115000"/>
               </a:lnSpc>
@@ -4984,7 +4710,7 @@
             <a:endParaRPr lang="en-US" sz="1250" dirty="0"/>
           </a:p>
           <a:p>
-            <a:pPr indent="0" marL="0">
+            <a:pPr marL="0" indent="0">
               <a:lnSpc>
                 <a:spcPct val="115000"/>
               </a:lnSpc>
@@ -5004,7 +4730,7 @@
             <a:endParaRPr lang="en-US" sz="1250" dirty="0"/>
           </a:p>
           <a:p>
-            <a:pPr indent="0" marL="0">
+            <a:pPr marL="0" indent="0">
               <a:lnSpc>
                 <a:spcPct val="115000"/>
               </a:lnSpc>
@@ -5046,7 +4772,7 @@
           <a:bodyPr wrap="square" lIns="0" tIns="0" rIns="0" bIns="0" rtlCol="0" anchor="ctr"/>
           <a:lstStyle/>
           <a:p>
-            <a:pPr indent="0" marL="0">
+            <a:pPr marL="0" indent="0">
               <a:buNone/>
             </a:pPr>
             <a:r>
@@ -5085,11 +4811,11 @@
           <a:bodyPr wrap="square" lIns="0" tIns="0" rIns="0" bIns="0" rtlCol="0" anchor="ctr"/>
           <a:lstStyle/>
           <a:p>
-            <a:pPr indent="0" marL="0">
-              <a:buNone/>
-            </a:pPr>
-            <a:r>
-              <a:rPr lang="en-US" sz="900" spc="100" kern="0" dirty="0">
+            <a:pPr marL="0" indent="0">
+              <a:buNone/>
+            </a:pPr>
+            <a:r>
+              <a:rPr lang="en-US" sz="900" kern="0" spc="100" dirty="0">
                 <a:solidFill>
                   <a:srgbClr val="A7AEC2"/>
                 </a:solidFill>
@@ -5124,7 +4850,7 @@
           <a:bodyPr wrap="square" lIns="0" tIns="0" rIns="0" bIns="0" rtlCol="0" anchor="ctr"/>
           <a:lstStyle/>
           <a:p>
-            <a:pPr algn="r" indent="0" marL="0">
+            <a:pPr marL="0" indent="0" algn="r">
               <a:buNone/>
             </a:pPr>
             <a:r>
@@ -5158,6 +4884,7 @@
         <a:solidFill>
           <a:srgbClr val="FFFFFF"/>
         </a:solidFill>
+        <a:effectLst/>
       </p:bgPr>
     </p:bg>
     <p:spTree>
@@ -5195,11 +4922,11 @@
           <a:bodyPr wrap="square" lIns="0" tIns="0" rIns="0" bIns="0" rtlCol="0" anchor="ctr"/>
           <a:lstStyle/>
           <a:p>
-            <a:pPr indent="0" marL="0">
-              <a:buNone/>
-            </a:pPr>
-            <a:r>
-              <a:rPr lang="en-US" sz="1200" b="1" spc="150" kern="0" dirty="0">
+            <a:pPr marL="0" indent="0">
+              <a:buNone/>
+            </a:pPr>
+            <a:r>
+              <a:rPr lang="en-US" sz="1200" b="1" kern="0" spc="150" dirty="0">
                 <a:solidFill>
                   <a:srgbClr val="1C7293"/>
                 </a:solidFill>
@@ -5234,7 +4961,7 @@
           <a:bodyPr wrap="square" lIns="0" tIns="0" rIns="0" bIns="0" rtlCol="0" anchor="ctr"/>
           <a:lstStyle/>
           <a:p>
-            <a:pPr indent="0" marL="0">
+            <a:pPr marL="0" indent="0">
               <a:buNone/>
             </a:pPr>
             <a:r>
@@ -5278,7 +5005,7 @@
             <a:prstDash val="solid"/>
           </a:ln>
           <a:effectLst>
-            <a:outerShdw sx="100000" sy="100000" kx="0" ky="0" algn="bl" rotWithShape="0" blurRad="101600" dist="38100" dir="5400000">
+            <a:outerShdw blurRad="101600" dist="38100" dir="5400000" algn="bl" rotWithShape="0">
               <a:srgbClr val="000000">
                 <a:alpha val="25000"/>
               </a:srgbClr>
@@ -5307,7 +5034,7 @@
           <a:bodyPr wrap="square" lIns="0" tIns="0" rIns="0" bIns="0" rtlCol="0" anchor="t"/>
           <a:lstStyle/>
           <a:p>
-            <a:pPr indent="0" marL="0">
+            <a:pPr marL="0" indent="0">
               <a:lnSpc>
                 <a:spcPct val="115000"/>
               </a:lnSpc>
@@ -5327,7 +5054,7 @@
             <a:endParaRPr lang="en-US" sz="1150" dirty="0"/>
           </a:p>
           <a:p>
-            <a:pPr indent="0" marL="0">
+            <a:pPr marL="0" indent="0">
               <a:lnSpc>
                 <a:spcPct val="115000"/>
               </a:lnSpc>
@@ -5347,7 +5074,7 @@
             <a:endParaRPr lang="en-US" sz="1150" dirty="0"/>
           </a:p>
           <a:p>
-            <a:pPr indent="0" marL="0">
+            <a:pPr marL="0" indent="0">
               <a:lnSpc>
                 <a:spcPct val="115000"/>
               </a:lnSpc>
@@ -5356,7 +5083,7 @@
             <a:endParaRPr lang="en-US" sz="1150" dirty="0"/>
           </a:p>
           <a:p>
-            <a:pPr indent="0" marL="0">
+            <a:pPr marL="0" indent="0">
               <a:lnSpc>
                 <a:spcPct val="115000"/>
               </a:lnSpc>
@@ -5376,7 +5103,7 @@
             <a:endParaRPr lang="en-US" sz="1150" dirty="0"/>
           </a:p>
           <a:p>
-            <a:pPr indent="0" marL="0">
+            <a:pPr marL="0" indent="0">
               <a:lnSpc>
                 <a:spcPct val="115000"/>
               </a:lnSpc>
@@ -5396,7 +5123,7 @@
             <a:endParaRPr lang="en-US" sz="1150" dirty="0"/>
           </a:p>
           <a:p>
-            <a:pPr indent="0" marL="0">
+            <a:pPr marL="0" indent="0">
               <a:lnSpc>
                 <a:spcPct val="115000"/>
               </a:lnSpc>
@@ -5416,7 +5143,7 @@
             <a:endParaRPr lang="en-US" sz="1150" dirty="0"/>
           </a:p>
           <a:p>
-            <a:pPr indent="0" marL="0">
+            <a:pPr marL="0" indent="0">
               <a:lnSpc>
                 <a:spcPct val="115000"/>
               </a:lnSpc>
@@ -5436,7 +5163,7 @@
             <a:endParaRPr lang="en-US" sz="1150" dirty="0"/>
           </a:p>
           <a:p>
-            <a:pPr indent="0" marL="0">
+            <a:pPr marL="0" indent="0">
               <a:lnSpc>
                 <a:spcPct val="115000"/>
               </a:lnSpc>
@@ -5456,7 +5183,7 @@
             <a:endParaRPr lang="en-US" sz="1150" dirty="0"/>
           </a:p>
           <a:p>
-            <a:pPr indent="0" marL="0">
+            <a:pPr marL="0" indent="0">
               <a:lnSpc>
                 <a:spcPct val="115000"/>
               </a:lnSpc>
@@ -5465,7 +5192,7 @@
             <a:endParaRPr lang="en-US" sz="1150" dirty="0"/>
           </a:p>
           <a:p>
-            <a:pPr indent="0" marL="0">
+            <a:pPr marL="0" indent="0">
               <a:lnSpc>
                 <a:spcPct val="115000"/>
               </a:lnSpc>
@@ -5485,7 +5212,7 @@
             <a:endParaRPr lang="en-US" sz="1150" dirty="0"/>
           </a:p>
           <a:p>
-            <a:pPr indent="0" marL="0">
+            <a:pPr marL="0" indent="0">
               <a:lnSpc>
                 <a:spcPct val="115000"/>
               </a:lnSpc>
@@ -5505,7 +5232,7 @@
             <a:endParaRPr lang="en-US" sz="1150" dirty="0"/>
           </a:p>
           <a:p>
-            <a:pPr indent="0" marL="0">
+            <a:pPr marL="0" indent="0">
               <a:lnSpc>
                 <a:spcPct val="115000"/>
               </a:lnSpc>
@@ -5525,7 +5252,7 @@
             <a:endParaRPr lang="en-US" sz="1150" dirty="0"/>
           </a:p>
           <a:p>
-            <a:pPr indent="0" marL="0">
+            <a:pPr marL="0" indent="0">
               <a:lnSpc>
                 <a:spcPct val="115000"/>
               </a:lnSpc>
@@ -5545,7 +5272,7 @@
             <a:endParaRPr lang="en-US" sz="1150" dirty="0"/>
           </a:p>
           <a:p>
-            <a:pPr indent="0" marL="0">
+            <a:pPr marL="0" indent="0">
               <a:lnSpc>
                 <a:spcPct val="115000"/>
               </a:lnSpc>
@@ -5554,7 +5281,7 @@
             <a:endParaRPr lang="en-US" sz="1150" dirty="0"/>
           </a:p>
           <a:p>
-            <a:pPr indent="0" marL="0">
+            <a:pPr marL="0" indent="0">
               <a:lnSpc>
                 <a:spcPct val="115000"/>
               </a:lnSpc>
@@ -5574,7 +5301,7 @@
             <a:endParaRPr lang="en-US" sz="1150" dirty="0"/>
           </a:p>
           <a:p>
-            <a:pPr indent="0" marL="0">
+            <a:pPr marL="0" indent="0">
               <a:lnSpc>
                 <a:spcPct val="115000"/>
               </a:lnSpc>
@@ -5594,7 +5321,7 @@
             <a:endParaRPr lang="en-US" sz="1150" dirty="0"/>
           </a:p>
           <a:p>
-            <a:pPr indent="0" marL="0">
+            <a:pPr marL="0" indent="0">
               <a:lnSpc>
                 <a:spcPct val="115000"/>
               </a:lnSpc>
@@ -5614,7 +5341,7 @@
             <a:endParaRPr lang="en-US" sz="1150" dirty="0"/>
           </a:p>
           <a:p>
-            <a:pPr indent="0" marL="0">
+            <a:pPr marL="0" indent="0">
               <a:lnSpc>
                 <a:spcPct val="115000"/>
               </a:lnSpc>
@@ -5634,7 +5361,7 @@
             <a:endParaRPr lang="en-US" sz="1150" dirty="0"/>
           </a:p>
           <a:p>
-            <a:pPr indent="0" marL="0">
+            <a:pPr marL="0" indent="0">
               <a:lnSpc>
                 <a:spcPct val="115000"/>
               </a:lnSpc>
@@ -5643,7 +5370,7 @@
             <a:endParaRPr lang="en-US" sz="1150" dirty="0"/>
           </a:p>
           <a:p>
-            <a:pPr indent="0" marL="0">
+            <a:pPr marL="0" indent="0">
               <a:lnSpc>
                 <a:spcPct val="115000"/>
               </a:lnSpc>
@@ -5663,7 +5390,7 @@
             <a:endParaRPr lang="en-US" sz="1150" dirty="0"/>
           </a:p>
           <a:p>
-            <a:pPr indent="0" marL="0">
+            <a:pPr marL="0" indent="0">
               <a:lnSpc>
                 <a:spcPct val="115000"/>
               </a:lnSpc>
@@ -5705,7 +5432,7 @@
           <a:bodyPr wrap="square" lIns="0" tIns="0" rIns="0" bIns="0" rtlCol="0" anchor="ctr"/>
           <a:lstStyle/>
           <a:p>
-            <a:pPr indent="0" marL="0">
+            <a:pPr marL="0" indent="0">
               <a:buNone/>
             </a:pPr>
             <a:r>
@@ -5764,7 +5491,7 @@
           <a:bodyPr wrap="square" lIns="0" tIns="0" rIns="0" bIns="0" rtlCol="0" anchor="ctr"/>
           <a:lstStyle/>
           <a:p>
-            <a:pPr algn="ctr" indent="0" marL="0">
+            <a:pPr marL="0" indent="0" algn="ctr">
               <a:buNone/>
             </a:pPr>
             <a:r>
@@ -5803,7 +5530,7 @@
           <a:bodyPr wrap="square" lIns="0" tIns="0" rIns="0" bIns="0" rtlCol="0" anchor="ctr"/>
           <a:lstStyle/>
           <a:p>
-            <a:pPr indent="0" marL="0">
+            <a:pPr marL="0" indent="0">
               <a:lnSpc>
                 <a:spcPct val="115000"/>
               </a:lnSpc>
@@ -5865,7 +5592,7 @@
           <a:bodyPr wrap="square" lIns="0" tIns="0" rIns="0" bIns="0" rtlCol="0" anchor="ctr"/>
           <a:lstStyle/>
           <a:p>
-            <a:pPr algn="ctr" indent="0" marL="0">
+            <a:pPr marL="0" indent="0" algn="ctr">
               <a:buNone/>
             </a:pPr>
             <a:r>
@@ -5904,7 +5631,7 @@
           <a:bodyPr wrap="square" lIns="0" tIns="0" rIns="0" bIns="0" rtlCol="0" anchor="ctr"/>
           <a:lstStyle/>
           <a:p>
-            <a:pPr indent="0" marL="0">
+            <a:pPr marL="0" indent="0">
               <a:lnSpc>
                 <a:spcPct val="115000"/>
               </a:lnSpc>
@@ -5966,7 +5693,7 @@
           <a:bodyPr wrap="square" lIns="0" tIns="0" rIns="0" bIns="0" rtlCol="0" anchor="ctr"/>
           <a:lstStyle/>
           <a:p>
-            <a:pPr algn="ctr" indent="0" marL="0">
+            <a:pPr marL="0" indent="0" algn="ctr">
               <a:buNone/>
             </a:pPr>
             <a:r>
@@ -6005,7 +5732,7 @@
           <a:bodyPr wrap="square" lIns="0" tIns="0" rIns="0" bIns="0" rtlCol="0" anchor="ctr"/>
           <a:lstStyle/>
           <a:p>
-            <a:pPr indent="0" marL="0">
+            <a:pPr marL="0" indent="0">
               <a:lnSpc>
                 <a:spcPct val="115000"/>
               </a:lnSpc>
@@ -6067,7 +5794,7 @@
           <a:bodyPr wrap="square" lIns="0" tIns="0" rIns="0" bIns="0" rtlCol="0" anchor="ctr"/>
           <a:lstStyle/>
           <a:p>
-            <a:pPr algn="ctr" indent="0" marL="0">
+            <a:pPr marL="0" indent="0" algn="ctr">
               <a:buNone/>
             </a:pPr>
             <a:r>
@@ -6106,7 +5833,7 @@
           <a:bodyPr wrap="square" lIns="0" tIns="0" rIns="0" bIns="0" rtlCol="0" anchor="ctr"/>
           <a:lstStyle/>
           <a:p>
-            <a:pPr indent="0" marL="0">
+            <a:pPr marL="0" indent="0">
               <a:lnSpc>
                 <a:spcPct val="115000"/>
               </a:lnSpc>
@@ -6148,11 +5875,11 @@
           <a:bodyPr wrap="square" lIns="0" tIns="0" rIns="0" bIns="0" rtlCol="0" anchor="ctr"/>
           <a:lstStyle/>
           <a:p>
-            <a:pPr indent="0" marL="0">
-              <a:buNone/>
-            </a:pPr>
-            <a:r>
-              <a:rPr lang="en-US" sz="900" spc="100" kern="0" dirty="0">
+            <a:pPr marL="0" indent="0">
+              <a:buNone/>
+            </a:pPr>
+            <a:r>
+              <a:rPr lang="en-US" sz="900" kern="0" spc="100" dirty="0">
                 <a:solidFill>
                   <a:srgbClr val="A7AEC2"/>
                 </a:solidFill>
@@ -6187,7 +5914,7 @@
           <a:bodyPr wrap="square" lIns="0" tIns="0" rIns="0" bIns="0" rtlCol="0" anchor="ctr"/>
           <a:lstStyle/>
           <a:p>
-            <a:pPr algn="r" indent="0" marL="0">
+            <a:pPr marL="0" indent="0" algn="r">
               <a:buNone/>
             </a:pPr>
             <a:r>
@@ -6221,6 +5948,7 @@
         <a:solidFill>
           <a:srgbClr val="FFFFFF"/>
         </a:solidFill>
+        <a:effectLst/>
       </p:bgPr>
     </p:bg>
     <p:spTree>
@@ -6258,11 +5986,11 @@
           <a:bodyPr wrap="square" lIns="0" tIns="0" rIns="0" bIns="0" rtlCol="0" anchor="ctr"/>
           <a:lstStyle/>
           <a:p>
-            <a:pPr indent="0" marL="0">
-              <a:buNone/>
-            </a:pPr>
-            <a:r>
-              <a:rPr lang="en-US" sz="1200" b="1" spc="150" kern="0" dirty="0">
+            <a:pPr marL="0" indent="0">
+              <a:buNone/>
+            </a:pPr>
+            <a:r>
+              <a:rPr lang="en-US" sz="1200" b="1" kern="0" spc="150" dirty="0">
                 <a:solidFill>
                   <a:srgbClr val="1C7293"/>
                 </a:solidFill>
@@ -6297,7 +6025,7 @@
           <a:bodyPr wrap="square" lIns="0" tIns="0" rIns="0" bIns="0" rtlCol="0" anchor="ctr"/>
           <a:lstStyle/>
           <a:p>
-            <a:pPr indent="0" marL="0">
+            <a:pPr marL="0" indent="0">
               <a:buNone/>
             </a:pPr>
             <a:r>
@@ -6358,7 +6086,7 @@
           <a:bodyPr wrap="square" lIns="0" tIns="0" rIns="0" bIns="0" rtlCol="0" anchor="ctr"/>
           <a:lstStyle/>
           <a:p>
-            <a:pPr indent="0" marL="0">
+            <a:pPr marL="0" indent="0">
               <a:buNone/>
             </a:pPr>
             <a:r>
@@ -6402,7 +6130,7 @@
             <a:prstDash val="solid"/>
           </a:ln>
           <a:effectLst>
-            <a:outerShdw sx="100000" sy="100000" kx="0" ky="0" algn="bl" rotWithShape="0" blurRad="101600" dist="38100" dir="5400000">
+            <a:outerShdw blurRad="101600" dist="38100" dir="5400000" algn="bl" rotWithShape="0">
               <a:srgbClr val="000000">
                 <a:alpha val="25000"/>
               </a:srgbClr>
@@ -6431,7 +6159,7 @@
           <a:bodyPr wrap="square" lIns="0" tIns="0" rIns="0" bIns="0" rtlCol="0" anchor="t"/>
           <a:lstStyle/>
           <a:p>
-            <a:pPr indent="0" marL="0">
+            <a:pPr marL="0" indent="0">
               <a:lnSpc>
                 <a:spcPct val="115000"/>
               </a:lnSpc>
@@ -6473,7 +6201,7 @@
           <a:bodyPr wrap="square" lIns="0" tIns="0" rIns="0" bIns="0" rtlCol="0" anchor="ctr"/>
           <a:lstStyle/>
           <a:p>
-            <a:pPr indent="0" marL="0">
+            <a:pPr marL="0" indent="0">
               <a:buNone/>
             </a:pPr>
             <a:r>
@@ -6512,7 +6240,7 @@
           <a:bodyPr wrap="square" lIns="0" tIns="0" rIns="0" bIns="0" rtlCol="0" anchor="ctr"/>
           <a:lstStyle/>
           <a:p>
-            <a:pPr indent="0" marL="0">
+            <a:pPr marL="0" indent="0">
               <a:buNone/>
             </a:pPr>
             <a:r>
@@ -6551,7 +6279,7 @@
           <a:bodyPr wrap="square" lIns="0" tIns="0" rIns="0" bIns="0" rtlCol="0" anchor="ctr"/>
           <a:lstStyle/>
           <a:p>
-            <a:pPr indent="0" marL="0">
+            <a:pPr marL="0" indent="0">
               <a:buNone/>
             </a:pPr>
             <a:r>
@@ -6590,7 +6318,7 @@
           <a:bodyPr wrap="square" lIns="0" tIns="0" rIns="0" bIns="0" rtlCol="0" anchor="ctr"/>
           <a:lstStyle/>
           <a:p>
-            <a:pPr indent="0" marL="0">
+            <a:pPr marL="0" indent="0">
               <a:buNone/>
             </a:pPr>
             <a:r>
@@ -6651,7 +6379,7 @@
           <a:bodyPr wrap="square" lIns="0" tIns="0" rIns="0" bIns="0" rtlCol="0" anchor="ctr"/>
           <a:lstStyle/>
           <a:p>
-            <a:pPr indent="0" marL="0">
+            <a:pPr marL="0" indent="0">
               <a:buNone/>
             </a:pPr>
             <a:r>
@@ -6695,7 +6423,7 @@
             <a:prstDash val="solid"/>
           </a:ln>
           <a:effectLst>
-            <a:outerShdw sx="100000" sy="100000" kx="0" ky="0" algn="bl" rotWithShape="0" blurRad="101600" dist="38100" dir="5400000">
+            <a:outerShdw blurRad="101600" dist="38100" dir="5400000" algn="bl" rotWithShape="0">
               <a:srgbClr val="000000">
                 <a:alpha val="25000"/>
               </a:srgbClr>
@@ -6724,7 +6452,7 @@
           <a:bodyPr wrap="square" lIns="0" tIns="0" rIns="0" bIns="0" rtlCol="0" anchor="t"/>
           <a:lstStyle/>
           <a:p>
-            <a:pPr indent="0" marL="0">
+            <a:pPr marL="0" indent="0">
               <a:lnSpc>
                 <a:spcPct val="115000"/>
               </a:lnSpc>
@@ -6766,7 +6494,7 @@
           <a:bodyPr wrap="square" lIns="0" tIns="0" rIns="0" bIns="0" rtlCol="0" anchor="ctr"/>
           <a:lstStyle/>
           <a:p>
-            <a:pPr indent="0" marL="0">
+            <a:pPr marL="0" indent="0">
               <a:buNone/>
             </a:pPr>
             <a:r>
@@ -6805,7 +6533,7 @@
           <a:bodyPr wrap="square" lIns="0" tIns="0" rIns="0" bIns="0" rtlCol="0" anchor="ctr"/>
           <a:lstStyle/>
           <a:p>
-            <a:pPr indent="0" marL="0">
+            <a:pPr marL="0" indent="0">
               <a:buNone/>
             </a:pPr>
             <a:r>
@@ -6844,7 +6572,7 @@
           <a:bodyPr wrap="square" lIns="0" tIns="0" rIns="0" bIns="0" rtlCol="0" anchor="ctr"/>
           <a:lstStyle/>
           <a:p>
-            <a:pPr indent="0" marL="0">
+            <a:pPr marL="0" indent="0">
               <a:buNone/>
             </a:pPr>
             <a:r>
@@ -6883,7 +6611,7 @@
           <a:bodyPr wrap="square" lIns="0" tIns="0" rIns="0" bIns="0" rtlCol="0" anchor="ctr"/>
           <a:lstStyle/>
           <a:p>
-            <a:pPr indent="0" marL="0">
+            <a:pPr marL="0" indent="0">
               <a:buNone/>
             </a:pPr>
             <a:r>
@@ -6922,11 +6650,11 @@
           <a:bodyPr wrap="square" lIns="0" tIns="0" rIns="0" bIns="0" rtlCol="0" anchor="ctr"/>
           <a:lstStyle/>
           <a:p>
-            <a:pPr indent="0" marL="0">
-              <a:buNone/>
-            </a:pPr>
-            <a:r>
-              <a:rPr lang="en-US" sz="900" spc="100" kern="0" dirty="0">
+            <a:pPr marL="0" indent="0">
+              <a:buNone/>
+            </a:pPr>
+            <a:r>
+              <a:rPr lang="en-US" sz="900" kern="0" spc="100" dirty="0">
                 <a:solidFill>
                   <a:srgbClr val="A7AEC2"/>
                 </a:solidFill>
@@ -6961,7 +6689,7 @@
           <a:bodyPr wrap="square" lIns="0" tIns="0" rIns="0" bIns="0" rtlCol="0" anchor="ctr"/>
           <a:lstStyle/>
           <a:p>
-            <a:pPr algn="r" indent="0" marL="0">
+            <a:pPr marL="0" indent="0" algn="r">
               <a:buNone/>
             </a:pPr>
             <a:r>
@@ -6995,6 +6723,7 @@
         <a:solidFill>
           <a:srgbClr val="1B1F3B"/>
         </a:solidFill>
+        <a:effectLst/>
       </p:bgPr>
     </p:bg>
     <p:spTree>
@@ -7032,11 +6761,11 @@
           <a:bodyPr wrap="square" lIns="0" tIns="0" rIns="0" bIns="0" rtlCol="0" anchor="ctr"/>
           <a:lstStyle/>
           <a:p>
-            <a:pPr indent="0" marL="0">
-              <a:buNone/>
-            </a:pPr>
-            <a:r>
-              <a:rPr lang="en-US" sz="1200" b="1" spc="150" kern="0" dirty="0">
+            <a:pPr marL="0" indent="0">
+              <a:buNone/>
+            </a:pPr>
+            <a:r>
+              <a:rPr lang="en-US" sz="1200" b="1" kern="0" spc="150" dirty="0">
                 <a:solidFill>
                   <a:srgbClr val="61DAFB"/>
                 </a:solidFill>
@@ -7071,7 +6800,7 @@
           <a:bodyPr wrap="square" lIns="0" tIns="0" rIns="0" bIns="0" rtlCol="0" anchor="ctr"/>
           <a:lstStyle/>
           <a:p>
-            <a:pPr indent="0" marL="0">
+            <a:pPr marL="0" indent="0">
               <a:buNone/>
             </a:pPr>
             <a:r>
@@ -7110,7 +6839,7 @@
           <a:bodyPr wrap="square" lIns="0" tIns="0" rIns="0" bIns="0" rtlCol="0" anchor="ctr"/>
           <a:lstStyle/>
           <a:p>
-            <a:pPr indent="0" marL="0">
+            <a:pPr marL="0" indent="0">
               <a:buNone/>
             </a:pPr>
             <a:r>
@@ -7176,7 +6905,7 @@
           <a:bodyPr wrap="square" lIns="0" tIns="0" rIns="0" bIns="0" rtlCol="0" anchor="ctr"/>
           <a:lstStyle/>
           <a:p>
-            <a:pPr algn="ctr" indent="0" marL="0">
+            <a:pPr marL="0" indent="0" algn="ctr">
               <a:buNone/>
             </a:pPr>
             <a:r>
@@ -7262,7 +6991,7 @@
           <a:bodyPr wrap="square" lIns="0" tIns="0" rIns="0" bIns="0" rtlCol="0" anchor="ctr"/>
           <a:lstStyle/>
           <a:p>
-            <a:pPr algn="ctr" indent="0" marL="0">
+            <a:pPr marL="0" indent="0" algn="ctr">
               <a:buNone/>
             </a:pPr>
             <a:r>
@@ -7348,7 +7077,7 @@
           <a:bodyPr wrap="square" lIns="0" tIns="0" rIns="0" bIns="0" rtlCol="0" anchor="ctr"/>
           <a:lstStyle/>
           <a:p>
-            <a:pPr algn="ctr" indent="0" marL="0">
+            <a:pPr marL="0" indent="0" algn="ctr">
               <a:buNone/>
             </a:pPr>
             <a:r>
@@ -7434,7 +7163,7 @@
           <a:bodyPr wrap="square" lIns="0" tIns="0" rIns="0" bIns="0" rtlCol="0" anchor="ctr"/>
           <a:lstStyle/>
           <a:p>
-            <a:pPr algn="ctr" indent="0" marL="0">
+            <a:pPr marL="0" indent="0" algn="ctr">
               <a:buNone/>
             </a:pPr>
             <a:r>
@@ -7520,7 +7249,7 @@
           <a:bodyPr wrap="square" lIns="0" tIns="0" rIns="0" bIns="0" rtlCol="0" anchor="ctr"/>
           <a:lstStyle/>
           <a:p>
-            <a:pPr algn="ctr" indent="0" marL="0">
+            <a:pPr marL="0" indent="0" algn="ctr">
               <a:buNone/>
             </a:pPr>
             <a:r>
@@ -7606,7 +7335,7 @@
           <a:bodyPr wrap="square" lIns="0" tIns="0" rIns="0" bIns="0" rtlCol="0" anchor="ctr"/>
           <a:lstStyle/>
           <a:p>
-            <a:pPr algn="ctr" indent="0" marL="0">
+            <a:pPr marL="0" indent="0" algn="ctr">
               <a:buNone/>
             </a:pPr>
             <a:r>
@@ -7665,7 +7394,7 @@
           <a:bodyPr wrap="square" lIns="0" tIns="0" rIns="0" bIns="0" rtlCol="0" anchor="ctr"/>
           <a:lstStyle/>
           <a:p>
-            <a:pPr algn="ctr" indent="0" marL="0">
+            <a:pPr marL="0" indent="0" algn="ctr">
               <a:buNone/>
             </a:pPr>
             <a:r>
@@ -7704,7 +7433,7 @@
           <a:bodyPr wrap="square" lIns="0" tIns="0" rIns="0" bIns="0" rtlCol="0" anchor="ctr"/>
           <a:lstStyle/>
           <a:p>
-            <a:pPr indent="0" marL="0">
+            <a:pPr marL="0" indent="0">
               <a:buNone/>
             </a:pPr>
             <a:r>
@@ -7763,7 +7492,7 @@
           <a:bodyPr wrap="square" lIns="0" tIns="0" rIns="0" bIns="0" rtlCol="0" anchor="ctr"/>
           <a:lstStyle/>
           <a:p>
-            <a:pPr algn="ctr" indent="0" marL="0">
+            <a:pPr marL="0" indent="0" algn="ctr">
               <a:buNone/>
             </a:pPr>
             <a:r>
@@ -7802,7 +7531,7 @@
           <a:bodyPr wrap="square" lIns="0" tIns="0" rIns="0" bIns="0" rtlCol="0" anchor="ctr"/>
           <a:lstStyle/>
           <a:p>
-            <a:pPr indent="0" marL="0">
+            <a:pPr marL="0" indent="0">
               <a:buNone/>
             </a:pPr>
             <a:r>
@@ -7861,7 +7590,7 @@
           <a:bodyPr wrap="square" lIns="0" tIns="0" rIns="0" bIns="0" rtlCol="0" anchor="ctr"/>
           <a:lstStyle/>
           <a:p>
-            <a:pPr algn="ctr" indent="0" marL="0">
+            <a:pPr marL="0" indent="0" algn="ctr">
               <a:buNone/>
             </a:pPr>
             <a:r>
@@ -7900,7 +7629,7 @@
           <a:bodyPr wrap="square" lIns="0" tIns="0" rIns="0" bIns="0" rtlCol="0" anchor="ctr"/>
           <a:lstStyle/>
           <a:p>
-            <a:pPr indent="0" marL="0">
+            <a:pPr marL="0" indent="0">
               <a:buNone/>
             </a:pPr>
             <a:r>
@@ -7959,7 +7688,7 @@
           <a:bodyPr wrap="square" lIns="0" tIns="0" rIns="0" bIns="0" rtlCol="0" anchor="ctr"/>
           <a:lstStyle/>
           <a:p>
-            <a:pPr algn="ctr" indent="0" marL="0">
+            <a:pPr marL="0" indent="0" algn="ctr">
               <a:buNone/>
             </a:pPr>
             <a:r>
@@ -7998,7 +7727,7 @@
           <a:bodyPr wrap="square" lIns="0" tIns="0" rIns="0" bIns="0" rtlCol="0" anchor="ctr"/>
           <a:lstStyle/>
           <a:p>
-            <a:pPr indent="0" marL="0">
+            <a:pPr marL="0" indent="0">
               <a:buNone/>
             </a:pPr>
             <a:r>
@@ -8057,7 +7786,7 @@
           <a:bodyPr wrap="square" lIns="0" tIns="0" rIns="0" bIns="0" rtlCol="0" anchor="ctr"/>
           <a:lstStyle/>
           <a:p>
-            <a:pPr algn="ctr" indent="0" marL="0">
+            <a:pPr marL="0" indent="0" algn="ctr">
               <a:buNone/>
             </a:pPr>
             <a:r>
@@ -8096,7 +7825,7 @@
           <a:bodyPr wrap="square" lIns="0" tIns="0" rIns="0" bIns="0" rtlCol="0" anchor="ctr"/>
           <a:lstStyle/>
           <a:p>
-            <a:pPr indent="0" marL="0">
+            <a:pPr marL="0" indent="0">
               <a:buNone/>
             </a:pPr>
             <a:r>
@@ -8135,11 +7864,11 @@
           <a:bodyPr wrap="square" lIns="0" tIns="0" rIns="0" bIns="0" rtlCol="0" anchor="ctr"/>
           <a:lstStyle/>
           <a:p>
-            <a:pPr indent="0" marL="0">
-              <a:buNone/>
-            </a:pPr>
-            <a:r>
-              <a:rPr lang="en-US" sz="900" spc="100" kern="0" dirty="0">
+            <a:pPr marL="0" indent="0">
+              <a:buNone/>
+            </a:pPr>
+            <a:r>
+              <a:rPr lang="en-US" sz="900" kern="0" spc="100" dirty="0">
                 <a:solidFill>
                   <a:srgbClr val="8891AE"/>
                 </a:solidFill>
@@ -8174,7 +7903,7 @@
           <a:bodyPr wrap="square" lIns="0" tIns="0" rIns="0" bIns="0" rtlCol="0" anchor="ctr"/>
           <a:lstStyle/>
           <a:p>
-            <a:pPr algn="r" indent="0" marL="0">
+            <a:pPr marL="0" indent="0" algn="r">
               <a:buNone/>
             </a:pPr>
             <a:r>
@@ -8208,6 +7937,7 @@
         <a:solidFill>
           <a:srgbClr val="FFFFFF"/>
         </a:solidFill>
+        <a:effectLst/>
       </p:bgPr>
     </p:bg>
     <p:spTree>
@@ -8245,11 +7975,11 @@
           <a:bodyPr wrap="square" lIns="0" tIns="0" rIns="0" bIns="0" rtlCol="0" anchor="ctr"/>
           <a:lstStyle/>
           <a:p>
-            <a:pPr indent="0" marL="0">
-              <a:buNone/>
-            </a:pPr>
-            <a:r>
-              <a:rPr lang="en-US" sz="1200" b="1" spc="150" kern="0" dirty="0">
+            <a:pPr marL="0" indent="0">
+              <a:buNone/>
+            </a:pPr>
+            <a:r>
+              <a:rPr lang="en-US" sz="1200" b="1" kern="0" spc="150" dirty="0">
                 <a:solidFill>
                   <a:srgbClr val="1C7293"/>
                 </a:solidFill>
@@ -8284,7 +8014,7 @@
           <a:bodyPr wrap="square" lIns="0" tIns="0" rIns="0" bIns="0" rtlCol="0" anchor="ctr"/>
           <a:lstStyle/>
           <a:p>
-            <a:pPr indent="0" marL="0">
+            <a:pPr marL="0" indent="0">
               <a:buNone/>
             </a:pPr>
             <a:r>
@@ -8323,7 +8053,7 @@
           <a:bodyPr wrap="square" lIns="0" tIns="0" rIns="0" bIns="0" rtlCol="0" anchor="ctr"/>
           <a:lstStyle/>
           <a:p>
-            <a:pPr indent="0" marL="0">
+            <a:pPr marL="0" indent="0">
               <a:buNone/>
             </a:pPr>
             <a:r>
@@ -8364,8 +8094,20 @@
             <a:tbl>
               <a:tblPr/>
               <a:tblGrid>
-                <a:gridCol w="3474720"/>
-                <a:gridCol w="2926080"/>
+                <a:gridCol w="3474720">
+                  <a:extLst>
+                    <a:ext uri="{9D8B030D-6E8A-4147-A177-3AD203B41FA5}">
+                      <a16:colId xmlns:a16="http://schemas.microsoft.com/office/drawing/2014/main" val="20000"/>
+                    </a:ext>
+                  </a:extLst>
+                </a:gridCol>
+                <a:gridCol w="2926080">
+                  <a:extLst>
+                    <a:ext uri="{9D8B030D-6E8A-4147-A177-3AD203B41FA5}">
+                      <a16:colId xmlns:a16="http://schemas.microsoft.com/office/drawing/2014/main" val="20001"/>
+                    </a:ext>
+                  </a:extLst>
+                </a:gridCol>
               </a:tblGrid>
               <a:tr h="502920">
                 <a:tc>
@@ -8373,7 +8115,7 @@
                     <a:bodyPr/>
                     <a:lstStyle/>
                     <a:p>
-                      <a:pPr indent="0" marL="0">
+                      <a:pPr marL="0" indent="0">
                         <a:buNone/>
                       </a:pPr>
                       <a:r>
@@ -8394,7 +8136,7 @@
                       </a:endParaRPr>
                     </a:p>
                   </a:txBody>
-                  <a:tcPr marL="91440" marR="91440" marT="45720" marB="45720">
+                  <a:tcPr>
                     <a:lnL w="12700" cap="flat" cmpd="sng" algn="ctr">
                       <a:solidFill>
                         <a:srgbClr val="E3E7F0"/>
@@ -8441,7 +8183,7 @@
                     <a:bodyPr/>
                     <a:lstStyle/>
                     <a:p>
-                      <a:pPr indent="0" marL="0">
+                      <a:pPr marL="0" indent="0">
                         <a:buNone/>
                       </a:pPr>
                       <a:r>
@@ -8462,7 +8204,7 @@
                       </a:endParaRPr>
                     </a:p>
                   </a:txBody>
-                  <a:tcPr marL="91440" marR="91440" marT="45720" marB="45720">
+                  <a:tcPr>
                     <a:lnL w="12700" cap="flat" cmpd="sng" algn="ctr">
                       <a:solidFill>
                         <a:srgbClr val="E3E7F0"/>
@@ -8504,6 +8246,11 @@
                     </a:solidFill>
                   </a:tcPr>
                 </a:tc>
+                <a:extLst>
+                  <a:ext uri="{0D108BD9-81ED-4DB2-BD59-A6C34878D82A}">
+                    <a16:rowId xmlns:a16="http://schemas.microsoft.com/office/drawing/2014/main" val="10000"/>
+                  </a:ext>
+                </a:extLst>
               </a:tr>
               <a:tr h="502920">
                 <a:tc>
@@ -8511,7 +8258,7 @@
                     <a:bodyPr/>
                     <a:lstStyle/>
                     <a:p>
-                      <a:pPr indent="0" marL="0">
+                      <a:pPr marL="0" indent="0">
                         <a:buNone/>
                       </a:pPr>
                       <a:r>
@@ -8532,7 +8279,7 @@
                       </a:endParaRPr>
                     </a:p>
                   </a:txBody>
-                  <a:tcPr marL="91440" marR="91440" marT="45720" marB="45720">
+                  <a:tcPr>
                     <a:lnL w="12700" cap="flat" cmpd="sng" algn="ctr">
                       <a:solidFill>
                         <a:srgbClr val="E3E7F0"/>
@@ -8579,7 +8326,7 @@
                     <a:bodyPr/>
                     <a:lstStyle/>
                     <a:p>
-                      <a:pPr indent="0" marL="0">
+                      <a:pPr marL="0" indent="0">
                         <a:buNone/>
                       </a:pPr>
                       <a:r>
@@ -8600,7 +8347,7 @@
                       </a:endParaRPr>
                     </a:p>
                   </a:txBody>
-                  <a:tcPr marL="91440" marR="91440" marT="45720" marB="45720">
+                  <a:tcPr>
                     <a:lnL w="12700" cap="flat" cmpd="sng" algn="ctr">
                       <a:solidFill>
                         <a:srgbClr val="E3E7F0"/>
@@ -8642,6 +8389,11 @@
                     </a:solidFill>
                   </a:tcPr>
                 </a:tc>
+                <a:extLst>
+                  <a:ext uri="{0D108BD9-81ED-4DB2-BD59-A6C34878D82A}">
+                    <a16:rowId xmlns:a16="http://schemas.microsoft.com/office/drawing/2014/main" val="10001"/>
+                  </a:ext>
+                </a:extLst>
               </a:tr>
               <a:tr h="502920">
                 <a:tc>
@@ -8649,7 +8401,7 @@
                     <a:bodyPr/>
                     <a:lstStyle/>
                     <a:p>
-                      <a:pPr indent="0" marL="0">
+                      <a:pPr marL="0" indent="0">
                         <a:buNone/>
                       </a:pPr>
                       <a:r>
@@ -8670,7 +8422,7 @@
                       </a:endParaRPr>
                     </a:p>
                   </a:txBody>
-                  <a:tcPr marL="91440" marR="91440" marT="45720" marB="45720">
+                  <a:tcPr>
                     <a:lnL w="12700" cap="flat" cmpd="sng" algn="ctr">
                       <a:solidFill>
                         <a:srgbClr val="E3E7F0"/>
@@ -8717,7 +8469,7 @@
                     <a:bodyPr/>
                     <a:lstStyle/>
                     <a:p>
-                      <a:pPr indent="0" marL="0">
+                      <a:pPr marL="0" indent="0">
                         <a:buNone/>
                       </a:pPr>
                       <a:r>
@@ -8738,7 +8490,7 @@
                       </a:endParaRPr>
                     </a:p>
                   </a:txBody>
-                  <a:tcPr marL="91440" marR="91440" marT="45720" marB="45720">
+                  <a:tcPr>
                     <a:lnL w="12700" cap="flat" cmpd="sng" algn="ctr">
                       <a:solidFill>
                         <a:srgbClr val="E3E7F0"/>
@@ -8780,6 +8532,11 @@
                     </a:solidFill>
                   </a:tcPr>
                 </a:tc>
+                <a:extLst>
+                  <a:ext uri="{0D108BD9-81ED-4DB2-BD59-A6C34878D82A}">
+                    <a16:rowId xmlns:a16="http://schemas.microsoft.com/office/drawing/2014/main" val="10002"/>
+                  </a:ext>
+                </a:extLst>
               </a:tr>
               <a:tr h="502920">
                 <a:tc>
@@ -8787,7 +8544,7 @@
                     <a:bodyPr/>
                     <a:lstStyle/>
                     <a:p>
-                      <a:pPr indent="0" marL="0">
+                      <a:pPr marL="0" indent="0">
                         <a:buNone/>
                       </a:pPr>
                       <a:r>
@@ -8808,7 +8565,7 @@
                       </a:endParaRPr>
                     </a:p>
                   </a:txBody>
-                  <a:tcPr marL="91440" marR="91440" marT="45720" marB="45720">
+                  <a:tcPr>
                     <a:lnL w="12700" cap="flat" cmpd="sng" algn="ctr">
                       <a:solidFill>
                         <a:srgbClr val="E3E7F0"/>
@@ -8855,7 +8612,7 @@
                     <a:bodyPr/>
                     <a:lstStyle/>
                     <a:p>
-                      <a:pPr indent="0" marL="0">
+                      <a:pPr marL="0" indent="0">
                         <a:buNone/>
                       </a:pPr>
                       <a:r>
@@ -8876,7 +8633,7 @@
                       </a:endParaRPr>
                     </a:p>
                   </a:txBody>
-                  <a:tcPr marL="91440" marR="91440" marT="45720" marB="45720">
+                  <a:tcPr>
                     <a:lnL w="12700" cap="flat" cmpd="sng" algn="ctr">
                       <a:solidFill>
                         <a:srgbClr val="E3E7F0"/>
@@ -8918,6 +8675,11 @@
                     </a:solidFill>
                   </a:tcPr>
                 </a:tc>
+                <a:extLst>
+                  <a:ext uri="{0D108BD9-81ED-4DB2-BD59-A6C34878D82A}">
+                    <a16:rowId xmlns:a16="http://schemas.microsoft.com/office/drawing/2014/main" val="10003"/>
+                  </a:ext>
+                </a:extLst>
               </a:tr>
               <a:tr h="502920">
                 <a:tc>
@@ -8925,7 +8687,7 @@
                     <a:bodyPr/>
                     <a:lstStyle/>
                     <a:p>
-                      <a:pPr indent="0" marL="0">
+                      <a:pPr marL="0" indent="0">
                         <a:buNone/>
                       </a:pPr>
                       <a:r>
@@ -8946,7 +8708,7 @@
                       </a:endParaRPr>
                     </a:p>
                   </a:txBody>
-                  <a:tcPr marL="91440" marR="91440" marT="45720" marB="45720">
+                  <a:tcPr>
                     <a:lnL w="12700" cap="flat" cmpd="sng" algn="ctr">
                       <a:solidFill>
                         <a:srgbClr val="E3E7F0"/>
@@ -8993,7 +8755,7 @@
                     <a:bodyPr/>
                     <a:lstStyle/>
                     <a:p>
-                      <a:pPr indent="0" marL="0">
+                      <a:pPr marL="0" indent="0">
                         <a:buNone/>
                       </a:pPr>
                       <a:r>
@@ -9014,7 +8776,7 @@
                       </a:endParaRPr>
                     </a:p>
                   </a:txBody>
-                  <a:tcPr marL="91440" marR="91440" marT="45720" marB="45720">
+                  <a:tcPr>
                     <a:lnL w="12700" cap="flat" cmpd="sng" algn="ctr">
                       <a:solidFill>
                         <a:srgbClr val="E3E7F0"/>
@@ -9056,6 +8818,11 @@
                     </a:solidFill>
                   </a:tcPr>
                 </a:tc>
+                <a:extLst>
+                  <a:ext uri="{0D108BD9-81ED-4DB2-BD59-A6C34878D82A}">
+                    <a16:rowId xmlns:a16="http://schemas.microsoft.com/office/drawing/2014/main" val="10004"/>
+                  </a:ext>
+                </a:extLst>
               </a:tr>
               <a:tr h="502920">
                 <a:tc>
@@ -9063,7 +8830,7 @@
                     <a:bodyPr/>
                     <a:lstStyle/>
                     <a:p>
-                      <a:pPr indent="0" marL="0">
+                      <a:pPr marL="0" indent="0">
                         <a:buNone/>
                       </a:pPr>
                       <a:r>
@@ -9084,7 +8851,7 @@
                       </a:endParaRPr>
                     </a:p>
                   </a:txBody>
-                  <a:tcPr marL="91440" marR="91440" marT="45720" marB="45720">
+                  <a:tcPr>
                     <a:lnL w="12700" cap="flat" cmpd="sng" algn="ctr">
                       <a:solidFill>
                         <a:srgbClr val="E3E7F0"/>
@@ -9131,7 +8898,7 @@
                     <a:bodyPr/>
                     <a:lstStyle/>
                     <a:p>
-                      <a:pPr indent="0" marL="0">
+                      <a:pPr marL="0" indent="0">
                         <a:buNone/>
                       </a:pPr>
                       <a:r>
@@ -9152,7 +8919,7 @@
                       </a:endParaRPr>
                     </a:p>
                   </a:txBody>
-                  <a:tcPr marL="91440" marR="91440" marT="45720" marB="45720">
+                  <a:tcPr>
                     <a:lnL w="12700" cap="flat" cmpd="sng" algn="ctr">
                       <a:solidFill>
                         <a:srgbClr val="E3E7F0"/>
@@ -9194,6 +8961,11 @@
                     </a:solidFill>
                   </a:tcPr>
                 </a:tc>
+                <a:extLst>
+                  <a:ext uri="{0D108BD9-81ED-4DB2-BD59-A6C34878D82A}">
+                    <a16:rowId xmlns:a16="http://schemas.microsoft.com/office/drawing/2014/main" val="10005"/>
+                  </a:ext>
+                </a:extLst>
               </a:tr>
               <a:tr h="502920">
                 <a:tc>
@@ -9201,7 +8973,7 @@
                     <a:bodyPr/>
                     <a:lstStyle/>
                     <a:p>
-                      <a:pPr indent="0" marL="0">
+                      <a:pPr marL="0" indent="0">
                         <a:buNone/>
                       </a:pPr>
                       <a:r>
@@ -9222,7 +8994,7 @@
                       </a:endParaRPr>
                     </a:p>
                   </a:txBody>
-                  <a:tcPr marL="91440" marR="91440" marT="45720" marB="45720">
+                  <a:tcPr>
                     <a:lnL w="12700" cap="flat" cmpd="sng" algn="ctr">
                       <a:solidFill>
                         <a:srgbClr val="E3E7F0"/>
@@ -9269,7 +9041,7 @@
                     <a:bodyPr/>
                     <a:lstStyle/>
                     <a:p>
-                      <a:pPr indent="0" marL="0">
+                      <a:pPr marL="0" indent="0">
                         <a:buNone/>
                       </a:pPr>
                       <a:r>
@@ -9290,7 +9062,7 @@
                       </a:endParaRPr>
                     </a:p>
                   </a:txBody>
-                  <a:tcPr marL="91440" marR="91440" marT="45720" marB="45720">
+                  <a:tcPr>
                     <a:lnL w="12700" cap="flat" cmpd="sng" algn="ctr">
                       <a:solidFill>
                         <a:srgbClr val="E3E7F0"/>
@@ -9332,6 +9104,11 @@
                     </a:solidFill>
                   </a:tcPr>
                 </a:tc>
+                <a:extLst>
+                  <a:ext uri="{0D108BD9-81ED-4DB2-BD59-A6C34878D82A}">
+                    <a16:rowId xmlns:a16="http://schemas.microsoft.com/office/drawing/2014/main" val="10006"/>
+                  </a:ext>
+                </a:extLst>
               </a:tr>
               <a:tr h="502920">
                 <a:tc>
@@ -9339,7 +9116,7 @@
                     <a:bodyPr/>
                     <a:lstStyle/>
                     <a:p>
-                      <a:pPr indent="0" marL="0">
+                      <a:pPr marL="0" indent="0">
                         <a:buNone/>
                       </a:pPr>
                       <a:r>
@@ -9360,7 +9137,7 @@
                       </a:endParaRPr>
                     </a:p>
                   </a:txBody>
-                  <a:tcPr marL="91440" marR="91440" marT="45720" marB="45720">
+                  <a:tcPr>
                     <a:lnL w="12700" cap="flat" cmpd="sng" algn="ctr">
                       <a:solidFill>
                         <a:srgbClr val="E3E7F0"/>
@@ -9407,7 +9184,7 @@
                     <a:bodyPr/>
                     <a:lstStyle/>
                     <a:p>
-                      <a:pPr indent="0" marL="0">
+                      <a:pPr marL="0" indent="0">
                         <a:buNone/>
                       </a:pPr>
                       <a:r>
@@ -9428,7 +9205,7 @@
                       </a:endParaRPr>
                     </a:p>
                   </a:txBody>
-                  <a:tcPr marL="91440" marR="91440" marT="45720" marB="45720">
+                  <a:tcPr>
                     <a:lnL w="12700" cap="flat" cmpd="sng" algn="ctr">
                       <a:solidFill>
                         <a:srgbClr val="E3E7F0"/>
@@ -9470,6 +9247,11 @@
                     </a:solidFill>
                   </a:tcPr>
                 </a:tc>
+                <a:extLst>
+                  <a:ext uri="{0D108BD9-81ED-4DB2-BD59-A6C34878D82A}">
+                    <a16:rowId xmlns:a16="http://schemas.microsoft.com/office/drawing/2014/main" val="10007"/>
+                  </a:ext>
+                </a:extLst>
               </a:tr>
             </a:tbl>
           </a:graphicData>
@@ -9518,7 +9300,7 @@
           <a:bodyPr wrap="square" lIns="0" tIns="0" rIns="0" bIns="0" rtlCol="0" anchor="ctr"/>
           <a:lstStyle/>
           <a:p>
-            <a:pPr indent="0" marL="0">
+            <a:pPr marL="0" indent="0">
               <a:buNone/>
             </a:pPr>
             <a:r>
@@ -9557,7 +9339,7 @@
           <a:bodyPr wrap="square" lIns="0" tIns="0" rIns="0" bIns="0" rtlCol="0" anchor="ctr"/>
           <a:lstStyle/>
           <a:p>
-            <a:pPr indent="0" marL="0">
+            <a:pPr marL="0" indent="0">
               <a:lnSpc>
                 <a:spcPct val="130000"/>
               </a:lnSpc>
@@ -9604,7 +9386,7 @@
             <a:prstDash val="solid"/>
           </a:ln>
           <a:effectLst>
-            <a:outerShdw sx="100000" sy="100000" kx="0" ky="0" algn="bl" rotWithShape="0" blurRad="101600" dist="38100" dir="5400000">
+            <a:outerShdw blurRad="101600" dist="38100" dir="5400000" algn="bl" rotWithShape="0">
               <a:srgbClr val="000000">
                 <a:alpha val="25000"/>
               </a:srgbClr>
@@ -9633,7 +9415,7 @@
           <a:bodyPr wrap="square" lIns="0" tIns="0" rIns="0" bIns="0" rtlCol="0" anchor="t"/>
           <a:lstStyle/>
           <a:p>
-            <a:pPr indent="0" marL="0">
+            <a:pPr marL="0" indent="0">
               <a:lnSpc>
                 <a:spcPct val="115000"/>
               </a:lnSpc>
@@ -9653,7 +9435,7 @@
             <a:endParaRPr lang="en-US" sz="1150" dirty="0"/>
           </a:p>
           <a:p>
-            <a:pPr indent="0" marL="0">
+            <a:pPr marL="0" indent="0">
               <a:lnSpc>
                 <a:spcPct val="115000"/>
               </a:lnSpc>
@@ -9673,7 +9455,7 @@
             <a:endParaRPr lang="en-US" sz="1150" dirty="0"/>
           </a:p>
           <a:p>
-            <a:pPr indent="0" marL="0">
+            <a:pPr marL="0" indent="0">
               <a:lnSpc>
                 <a:spcPct val="115000"/>
               </a:lnSpc>
@@ -9693,7 +9475,7 @@
             <a:endParaRPr lang="en-US" sz="1150" dirty="0"/>
           </a:p>
           <a:p>
-            <a:pPr indent="0" marL="0">
+            <a:pPr marL="0" indent="0">
               <a:lnSpc>
                 <a:spcPct val="115000"/>
               </a:lnSpc>
@@ -9713,7 +9495,7 @@
             <a:endParaRPr lang="en-US" sz="1150" dirty="0"/>
           </a:p>
           <a:p>
-            <a:pPr indent="0" marL="0">
+            <a:pPr marL="0" indent="0">
               <a:lnSpc>
                 <a:spcPct val="115000"/>
               </a:lnSpc>
@@ -9755,11 +9537,11 @@
           <a:bodyPr wrap="square" lIns="0" tIns="0" rIns="0" bIns="0" rtlCol="0" anchor="ctr"/>
           <a:lstStyle/>
           <a:p>
-            <a:pPr indent="0" marL="0">
-              <a:buNone/>
-            </a:pPr>
-            <a:r>
-              <a:rPr lang="en-US" sz="900" spc="100" kern="0" dirty="0">
+            <a:pPr marL="0" indent="0">
+              <a:buNone/>
+            </a:pPr>
+            <a:r>
+              <a:rPr lang="en-US" sz="900" kern="0" spc="100" dirty="0">
                 <a:solidFill>
                   <a:srgbClr val="A7AEC2"/>
                 </a:solidFill>
@@ -9794,7 +9576,7 @@
           <a:bodyPr wrap="square" lIns="0" tIns="0" rIns="0" bIns="0" rtlCol="0" anchor="ctr"/>
           <a:lstStyle/>
           <a:p>
-            <a:pPr algn="r" indent="0" marL="0">
+            <a:pPr marL="0" indent="0" algn="r">
               <a:buNone/>
             </a:pPr>
             <a:r>
@@ -9828,6 +9610,7 @@
         <a:solidFill>
           <a:srgbClr val="FFFFFF"/>
         </a:solidFill>
+        <a:effectLst/>
       </p:bgPr>
     </p:bg>
     <p:spTree>
@@ -9865,11 +9648,11 @@
           <a:bodyPr wrap="square" lIns="0" tIns="0" rIns="0" bIns="0" rtlCol="0" anchor="ctr"/>
           <a:lstStyle/>
           <a:p>
-            <a:pPr indent="0" marL="0">
-              <a:buNone/>
-            </a:pPr>
-            <a:r>
-              <a:rPr lang="en-US" sz="1200" b="1" spc="150" kern="0" dirty="0">
+            <a:pPr marL="0" indent="0">
+              <a:buNone/>
+            </a:pPr>
+            <a:r>
+              <a:rPr lang="en-US" sz="1200" b="1" kern="0" spc="150" dirty="0">
                 <a:solidFill>
                   <a:srgbClr val="1C7293"/>
                 </a:solidFill>
@@ -9904,7 +9687,7 @@
           <a:bodyPr wrap="square" lIns="0" tIns="0" rIns="0" bIns="0" rtlCol="0" anchor="ctr"/>
           <a:lstStyle/>
           <a:p>
-            <a:pPr indent="0" marL="0">
+            <a:pPr marL="0" indent="0">
               <a:buNone/>
             </a:pPr>
             <a:r>
@@ -9943,7 +9726,7 @@
           <a:bodyPr wrap="square" lIns="0" tIns="0" rIns="0" bIns="0" rtlCol="0" anchor="ctr"/>
           <a:lstStyle/>
           <a:p>
-            <a:pPr indent="0" marL="0">
+            <a:pPr marL="0" indent="0">
               <a:lnSpc>
                 <a:spcPct val="130000"/>
               </a:lnSpc>
@@ -10007,7 +9790,7 @@
           <a:bodyPr wrap="square" lIns="0" tIns="0" rIns="0" bIns="0" rtlCol="0" anchor="ctr"/>
           <a:lstStyle/>
           <a:p>
-            <a:pPr indent="0" marL="0">
+            <a:pPr marL="0" indent="0">
               <a:buNone/>
             </a:pPr>
             <a:r>
@@ -10046,7 +9829,7 @@
           <a:bodyPr wrap="square" lIns="0" tIns="0" rIns="0" bIns="0" rtlCol="0" anchor="ctr"/>
           <a:lstStyle/>
           <a:p>
-            <a:pPr indent="0" marL="0">
+            <a:pPr marL="0" indent="0">
               <a:lnSpc>
                 <a:spcPct val="135000"/>
               </a:lnSpc>
@@ -10108,7 +9891,7 @@
           <a:bodyPr wrap="square" lIns="0" tIns="0" rIns="0" bIns="0" rtlCol="0" anchor="ctr"/>
           <a:lstStyle/>
           <a:p>
-            <a:pPr algn="ctr" indent="0" marL="0">
+            <a:pPr marL="0" indent="0" algn="ctr">
               <a:buNone/>
             </a:pPr>
             <a:r>
@@ -10147,7 +9930,7 @@
           <a:bodyPr wrap="square" lIns="0" tIns="0" rIns="0" bIns="0" rtlCol="0" anchor="ctr"/>
           <a:lstStyle/>
           <a:p>
-            <a:pPr indent="0" marL="0">
+            <a:pPr marL="0" indent="0">
               <a:buNone/>
             </a:pPr>
             <a:r>
@@ -10186,7 +9969,7 @@
           <a:bodyPr wrap="square" lIns="0" tIns="0" rIns="0" bIns="0" rtlCol="0" anchor="ctr"/>
           <a:lstStyle/>
           <a:p>
-            <a:pPr indent="0" marL="0">
+            <a:pPr marL="0" indent="0">
               <a:buNone/>
             </a:pPr>
             <a:r>
@@ -10245,7 +10028,7 @@
           <a:bodyPr wrap="square" lIns="0" tIns="0" rIns="0" bIns="0" rtlCol="0" anchor="ctr"/>
           <a:lstStyle/>
           <a:p>
-            <a:pPr algn="ctr" indent="0" marL="0">
+            <a:pPr marL="0" indent="0" algn="ctr">
               <a:buNone/>
             </a:pPr>
             <a:r>
@@ -10284,7 +10067,7 @@
           <a:bodyPr wrap="square" lIns="0" tIns="0" rIns="0" bIns="0" rtlCol="0" anchor="ctr"/>
           <a:lstStyle/>
           <a:p>
-            <a:pPr indent="0" marL="0">
+            <a:pPr marL="0" indent="0">
               <a:buNone/>
             </a:pPr>
             <a:r>
@@ -10323,7 +10106,7 @@
           <a:bodyPr wrap="square" lIns="0" tIns="0" rIns="0" bIns="0" rtlCol="0" anchor="ctr"/>
           <a:lstStyle/>
           <a:p>
-            <a:pPr indent="0" marL="0">
+            <a:pPr marL="0" indent="0">
               <a:buNone/>
             </a:pPr>
             <a:r>
@@ -10382,7 +10165,7 @@
           <a:bodyPr wrap="square" lIns="0" tIns="0" rIns="0" bIns="0" rtlCol="0" anchor="ctr"/>
           <a:lstStyle/>
           <a:p>
-            <a:pPr algn="ctr" indent="0" marL="0">
+            <a:pPr marL="0" indent="0" algn="ctr">
               <a:buNone/>
             </a:pPr>
             <a:r>
@@ -10421,7 +10204,7 @@
           <a:bodyPr wrap="square" lIns="0" tIns="0" rIns="0" bIns="0" rtlCol="0" anchor="ctr"/>
           <a:lstStyle/>
           <a:p>
-            <a:pPr indent="0" marL="0">
+            <a:pPr marL="0" indent="0">
               <a:buNone/>
             </a:pPr>
             <a:r>
@@ -10460,7 +10243,7 @@
           <a:bodyPr wrap="square" lIns="0" tIns="0" rIns="0" bIns="0" rtlCol="0" anchor="ctr"/>
           <a:lstStyle/>
           <a:p>
-            <a:pPr indent="0" marL="0">
+            <a:pPr marL="0" indent="0">
               <a:buNone/>
             </a:pPr>
             <a:r>
@@ -10519,7 +10302,7 @@
           <a:bodyPr wrap="square" lIns="0" tIns="0" rIns="0" bIns="0" rtlCol="0" anchor="ctr"/>
           <a:lstStyle/>
           <a:p>
-            <a:pPr algn="ctr" indent="0" marL="0">
+            <a:pPr marL="0" indent="0" algn="ctr">
               <a:buNone/>
             </a:pPr>
             <a:r>
@@ -10558,7 +10341,7 @@
           <a:bodyPr wrap="square" lIns="0" tIns="0" rIns="0" bIns="0" rtlCol="0" anchor="ctr"/>
           <a:lstStyle/>
           <a:p>
-            <a:pPr indent="0" marL="0">
+            <a:pPr marL="0" indent="0">
               <a:buNone/>
             </a:pPr>
             <a:r>
@@ -10597,7 +10380,7 @@
           <a:bodyPr wrap="square" lIns="0" tIns="0" rIns="0" bIns="0" rtlCol="0" anchor="ctr"/>
           <a:lstStyle/>
           <a:p>
-            <a:pPr indent="0" marL="0">
+            <a:pPr marL="0" indent="0">
               <a:buNone/>
             </a:pPr>
             <a:r>
@@ -10656,7 +10439,7 @@
           <a:bodyPr wrap="square" lIns="0" tIns="0" rIns="0" bIns="0" rtlCol="0" anchor="ctr"/>
           <a:lstStyle/>
           <a:p>
-            <a:pPr algn="ctr" indent="0" marL="0">
+            <a:pPr marL="0" indent="0" algn="ctr">
               <a:buNone/>
             </a:pPr>
             <a:r>
@@ -10695,7 +10478,7 @@
           <a:bodyPr wrap="square" lIns="0" tIns="0" rIns="0" bIns="0" rtlCol="0" anchor="ctr"/>
           <a:lstStyle/>
           <a:p>
-            <a:pPr indent="0" marL="0">
+            <a:pPr marL="0" indent="0">
               <a:buNone/>
             </a:pPr>
             <a:r>
@@ -10734,7 +10517,7 @@
           <a:bodyPr wrap="square" lIns="0" tIns="0" rIns="0" bIns="0" rtlCol="0" anchor="ctr"/>
           <a:lstStyle/>
           <a:p>
-            <a:pPr indent="0" marL="0">
+            <a:pPr marL="0" indent="0">
               <a:buNone/>
             </a:pPr>
             <a:r>
@@ -10773,11 +10556,11 @@
           <a:bodyPr wrap="square" lIns="0" tIns="0" rIns="0" bIns="0" rtlCol="0" anchor="ctr"/>
           <a:lstStyle/>
           <a:p>
-            <a:pPr indent="0" marL="0">
-              <a:buNone/>
-            </a:pPr>
-            <a:r>
-              <a:rPr lang="en-US" sz="900" spc="100" kern="0" dirty="0">
+            <a:pPr marL="0" indent="0">
+              <a:buNone/>
+            </a:pPr>
+            <a:r>
+              <a:rPr lang="en-US" sz="900" kern="0" spc="100" dirty="0">
                 <a:solidFill>
                   <a:srgbClr val="A7AEC2"/>
                 </a:solidFill>
@@ -10812,7 +10595,7 @@
           <a:bodyPr wrap="square" lIns="0" tIns="0" rIns="0" bIns="0" rtlCol="0" anchor="ctr"/>
           <a:lstStyle/>
           <a:p>
-            <a:pPr algn="r" indent="0" marL="0">
+            <a:pPr marL="0" indent="0" algn="r">
               <a:buNone/>
             </a:pPr>
             <a:r>
@@ -10846,6 +10629,7 @@
         <a:solidFill>
           <a:srgbClr val="FFFFFF"/>
         </a:solidFill>
+        <a:effectLst/>
       </p:bgPr>
     </p:bg>
     <p:spTree>
@@ -10883,11 +10667,11 @@
           <a:bodyPr wrap="square" lIns="0" tIns="0" rIns="0" bIns="0" rtlCol="0" anchor="ctr"/>
           <a:lstStyle/>
           <a:p>
-            <a:pPr indent="0" marL="0">
-              <a:buNone/>
-            </a:pPr>
-            <a:r>
-              <a:rPr lang="en-US" sz="1200" b="1" spc="150" kern="0" dirty="0">
+            <a:pPr marL="0" indent="0">
+              <a:buNone/>
+            </a:pPr>
+            <a:r>
+              <a:rPr lang="en-US" sz="1200" b="1" kern="0" spc="150" dirty="0">
                 <a:solidFill>
                   <a:srgbClr val="1C7293"/>
                 </a:solidFill>
@@ -10922,7 +10706,7 @@
           <a:bodyPr wrap="square" lIns="0" tIns="0" rIns="0" bIns="0" rtlCol="0" anchor="ctr"/>
           <a:lstStyle/>
           <a:p>
-            <a:pPr indent="0" marL="0">
+            <a:pPr marL="0" indent="0">
               <a:buNone/>
             </a:pPr>
             <a:r>
@@ -10961,7 +10745,7 @@
           <a:bodyPr wrap="square" lIns="0" tIns="0" rIns="0" bIns="0" rtlCol="0" anchor="ctr"/>
           <a:lstStyle/>
           <a:p>
-            <a:pPr indent="0" marL="0">
+            <a:pPr marL="0" indent="0">
               <a:buNone/>
             </a:pPr>
             <a:r>
@@ -11020,7 +10804,7 @@
           <a:bodyPr wrap="square" lIns="0" tIns="0" rIns="0" bIns="0" rtlCol="0" anchor="ctr"/>
           <a:lstStyle/>
           <a:p>
-            <a:pPr algn="ctr" indent="0" marL="0">
+            <a:pPr marL="0" indent="0" algn="ctr">
               <a:buNone/>
             </a:pPr>
             <a:r>
@@ -11059,7 +10843,7 @@
           <a:bodyPr wrap="square" lIns="0" tIns="0" rIns="0" bIns="0" rtlCol="0" anchor="ctr"/>
           <a:lstStyle/>
           <a:p>
-            <a:pPr indent="0" marL="0">
+            <a:pPr marL="0" indent="0">
               <a:buNone/>
             </a:pPr>
             <a:r>
@@ -11103,7 +10887,7 @@
             <a:prstDash val="solid"/>
           </a:ln>
           <a:effectLst>
-            <a:outerShdw sx="100000" sy="100000" kx="0" ky="0" algn="bl" rotWithShape="0" blurRad="101600" dist="38100" dir="5400000">
+            <a:outerShdw blurRad="101600" dist="38100" dir="5400000" algn="bl" rotWithShape="0">
               <a:srgbClr val="000000">
                 <a:alpha val="25000"/>
               </a:srgbClr>
@@ -11132,7 +10916,7 @@
           <a:bodyPr wrap="square" lIns="0" tIns="0" rIns="0" bIns="0" rtlCol="0" anchor="t"/>
           <a:lstStyle/>
           <a:p>
-            <a:pPr indent="0" marL="0">
+            <a:pPr marL="0" indent="0">
               <a:lnSpc>
                 <a:spcPct val="115000"/>
               </a:lnSpc>
@@ -11194,7 +10978,7 @@
           <a:bodyPr wrap="square" lIns="0" tIns="0" rIns="0" bIns="0" rtlCol="0" anchor="ctr"/>
           <a:lstStyle/>
           <a:p>
-            <a:pPr algn="ctr" indent="0" marL="0">
+            <a:pPr marL="0" indent="0" algn="ctr">
               <a:buNone/>
             </a:pPr>
             <a:r>
@@ -11233,7 +11017,7 @@
           <a:bodyPr wrap="square" lIns="0" tIns="0" rIns="0" bIns="0" rtlCol="0" anchor="ctr"/>
           <a:lstStyle/>
           <a:p>
-            <a:pPr indent="0" marL="0">
+            <a:pPr marL="0" indent="0">
               <a:buNone/>
             </a:pPr>
             <a:r>
@@ -11277,7 +11061,7 @@
             <a:prstDash val="solid"/>
           </a:ln>
           <a:effectLst>
-            <a:outerShdw sx="100000" sy="100000" kx="0" ky="0" algn="bl" rotWithShape="0" blurRad="101600" dist="38100" dir="5400000">
+            <a:outerShdw blurRad="101600" dist="38100" dir="5400000" algn="bl" rotWithShape="0">
               <a:srgbClr val="000000">
                 <a:alpha val="25000"/>
               </a:srgbClr>
@@ -11306,7 +11090,7 @@
           <a:bodyPr wrap="square" lIns="0" tIns="0" rIns="0" bIns="0" rtlCol="0" anchor="t"/>
           <a:lstStyle/>
           <a:p>
-            <a:pPr indent="0" marL="0">
+            <a:pPr marL="0" indent="0">
               <a:lnSpc>
                 <a:spcPct val="115000"/>
               </a:lnSpc>
@@ -11370,7 +11154,7 @@
           <a:bodyPr wrap="square" lIns="0" tIns="0" rIns="0" bIns="0" rtlCol="0" anchor="ctr"/>
           <a:lstStyle/>
           <a:p>
-            <a:pPr indent="0" marL="0">
+            <a:pPr marL="0" indent="0">
               <a:buNone/>
             </a:pPr>
             <a:r>
@@ -11409,7 +11193,7 @@
           <a:bodyPr wrap="square" lIns="0" tIns="0" rIns="0" bIns="0" rtlCol="0" anchor="ctr"/>
           <a:lstStyle/>
           <a:p>
-            <a:pPr indent="0" marL="0">
+            <a:pPr marL="0" indent="0">
               <a:lnSpc>
                 <a:spcPct val="130000"/>
               </a:lnSpc>
@@ -11451,11 +11235,11 @@
           <a:bodyPr wrap="square" lIns="0" tIns="0" rIns="0" bIns="0" rtlCol="0" anchor="ctr"/>
           <a:lstStyle/>
           <a:p>
-            <a:pPr indent="0" marL="0">
-              <a:buNone/>
-            </a:pPr>
-            <a:r>
-              <a:rPr lang="en-US" sz="900" spc="100" kern="0" dirty="0">
+            <a:pPr marL="0" indent="0">
+              <a:buNone/>
+            </a:pPr>
+            <a:r>
+              <a:rPr lang="en-US" sz="900" kern="0" spc="100" dirty="0">
                 <a:solidFill>
                   <a:srgbClr val="A7AEC2"/>
                 </a:solidFill>
@@ -11490,7 +11274,7 @@
           <a:bodyPr wrap="square" lIns="0" tIns="0" rIns="0" bIns="0" rtlCol="0" anchor="ctr"/>
           <a:lstStyle/>
           <a:p>
-            <a:pPr algn="r" indent="0" marL="0">
+            <a:pPr marL="0" indent="0" algn="r">
               <a:buNone/>
             </a:pPr>
             <a:r>
@@ -11524,6 +11308,7 @@
         <a:solidFill>
           <a:srgbClr val="1B1F3B"/>
         </a:solidFill>
+        <a:effectLst/>
       </p:bgPr>
     </p:bg>
     <p:spTree>
@@ -11561,11 +11346,11 @@
           <a:bodyPr wrap="square" lIns="0" tIns="0" rIns="0" bIns="0" rtlCol="0" anchor="ctr"/>
           <a:lstStyle/>
           <a:p>
-            <a:pPr indent="0" marL="0">
-              <a:buNone/>
-            </a:pPr>
-            <a:r>
-              <a:rPr lang="en-US" sz="1200" b="1" spc="150" kern="0" dirty="0">
+            <a:pPr marL="0" indent="0">
+              <a:buNone/>
+            </a:pPr>
+            <a:r>
+              <a:rPr lang="en-US" sz="1200" b="1" kern="0" spc="150" dirty="0">
                 <a:solidFill>
                   <a:srgbClr val="61DAFB"/>
                 </a:solidFill>
@@ -11600,7 +11385,7 @@
           <a:bodyPr wrap="square" lIns="0" tIns="0" rIns="0" bIns="0" rtlCol="0" anchor="ctr"/>
           <a:lstStyle/>
           <a:p>
-            <a:pPr indent="0" marL="0">
+            <a:pPr marL="0" indent="0">
               <a:buNone/>
             </a:pPr>
             <a:r>
@@ -11666,7 +11451,7 @@
           <a:bodyPr wrap="square" lIns="0" tIns="0" rIns="0" bIns="0" rtlCol="0" anchor="ctr"/>
           <a:lstStyle/>
           <a:p>
-            <a:pPr indent="0" marL="0">
+            <a:pPr marL="0" indent="0">
               <a:buNone/>
             </a:pPr>
             <a:r>
@@ -11705,7 +11490,7 @@
           <a:bodyPr wrap="square" lIns="0" tIns="0" rIns="0" bIns="0" rtlCol="0" anchor="ctr"/>
           <a:lstStyle/>
           <a:p>
-            <a:pPr indent="0" marL="0">
+            <a:pPr marL="0" indent="0">
               <a:buNone/>
             </a:pPr>
             <a:r>
@@ -11744,7 +11529,7 @@
           <a:bodyPr wrap="square" lIns="0" tIns="0" rIns="0" bIns="0" rtlCol="0" anchor="ctr"/>
           <a:lstStyle/>
           <a:p>
-            <a:pPr indent="0" marL="0">
+            <a:pPr marL="0" indent="0">
               <a:buNone/>
             </a:pPr>
             <a:r>
@@ -11830,7 +11615,7 @@
           <a:bodyPr wrap="square" lIns="0" tIns="0" rIns="0" bIns="0" rtlCol="0" anchor="ctr"/>
           <a:lstStyle/>
           <a:p>
-            <a:pPr indent="0" marL="0">
+            <a:pPr marL="0" indent="0">
               <a:buNone/>
             </a:pPr>
             <a:r>
@@ -11869,7 +11654,7 @@
           <a:bodyPr wrap="square" lIns="0" tIns="0" rIns="0" bIns="0" rtlCol="0" anchor="ctr"/>
           <a:lstStyle/>
           <a:p>
-            <a:pPr indent="0" marL="0">
+            <a:pPr marL="0" indent="0">
               <a:buNone/>
             </a:pPr>
             <a:r>
@@ -11908,7 +11693,7 @@
           <a:bodyPr wrap="square" lIns="0" tIns="0" rIns="0" bIns="0" rtlCol="0" anchor="ctr"/>
           <a:lstStyle/>
           <a:p>
-            <a:pPr indent="0" marL="0">
+            <a:pPr marL="0" indent="0">
               <a:buNone/>
             </a:pPr>
             <a:r>
@@ -11994,7 +11779,7 @@
           <a:bodyPr wrap="square" lIns="0" tIns="0" rIns="0" bIns="0" rtlCol="0" anchor="ctr"/>
           <a:lstStyle/>
           <a:p>
-            <a:pPr indent="0" marL="0">
+            <a:pPr marL="0" indent="0">
               <a:buNone/>
             </a:pPr>
             <a:r>
@@ -12033,7 +11818,7 @@
           <a:bodyPr wrap="square" lIns="0" tIns="0" rIns="0" bIns="0" rtlCol="0" anchor="ctr"/>
           <a:lstStyle/>
           <a:p>
-            <a:pPr indent="0" marL="0">
+            <a:pPr marL="0" indent="0">
               <a:buNone/>
             </a:pPr>
             <a:r>
@@ -12072,7 +11857,7 @@
           <a:bodyPr wrap="square" lIns="0" tIns="0" rIns="0" bIns="0" rtlCol="0" anchor="ctr"/>
           <a:lstStyle/>
           <a:p>
-            <a:pPr indent="0" marL="0">
+            <a:pPr marL="0" indent="0">
               <a:buNone/>
             </a:pPr>
             <a:r>
@@ -12158,7 +11943,7 @@
           <a:bodyPr wrap="square" lIns="0" tIns="0" rIns="0" bIns="0" rtlCol="0" anchor="ctr"/>
           <a:lstStyle/>
           <a:p>
-            <a:pPr indent="0" marL="0">
+            <a:pPr marL="0" indent="0">
               <a:buNone/>
             </a:pPr>
             <a:r>
@@ -12197,7 +11982,7 @@
           <a:bodyPr wrap="square" lIns="0" tIns="0" rIns="0" bIns="0" rtlCol="0" anchor="ctr"/>
           <a:lstStyle/>
           <a:p>
-            <a:pPr indent="0" marL="0">
+            <a:pPr marL="0" indent="0">
               <a:buNone/>
             </a:pPr>
             <a:r>
@@ -12236,7 +12021,7 @@
           <a:bodyPr wrap="square" lIns="0" tIns="0" rIns="0" bIns="0" rtlCol="0" anchor="ctr"/>
           <a:lstStyle/>
           <a:p>
-            <a:pPr indent="0" marL="0">
+            <a:pPr marL="0" indent="0">
               <a:buNone/>
             </a:pPr>
             <a:r>
@@ -12275,7 +12060,7 @@
           <a:bodyPr wrap="square" lIns="0" tIns="0" rIns="0" bIns="0" rtlCol="0" anchor="ctr"/>
           <a:lstStyle/>
           <a:p>
-            <a:pPr indent="0" marL="0">
+            <a:pPr marL="0" indent="0">
               <a:buNone/>
             </a:pPr>
             <a:r>
@@ -12314,11 +12099,11 @@
           <a:bodyPr wrap="square" lIns="0" tIns="0" rIns="0" bIns="0" rtlCol="0" anchor="ctr"/>
           <a:lstStyle/>
           <a:p>
-            <a:pPr indent="0" marL="0">
-              <a:buNone/>
-            </a:pPr>
-            <a:r>
-              <a:rPr lang="en-US" sz="900" spc="100" kern="0" dirty="0">
+            <a:pPr marL="0" indent="0">
+              <a:buNone/>
+            </a:pPr>
+            <a:r>
+              <a:rPr lang="en-US" sz="900" kern="0" spc="100" dirty="0">
                 <a:solidFill>
                   <a:srgbClr val="8891AE"/>
                 </a:solidFill>
@@ -12353,7 +12138,7 @@
           <a:bodyPr wrap="square" lIns="0" tIns="0" rIns="0" bIns="0" rtlCol="0" anchor="ctr"/>
           <a:lstStyle/>
           <a:p>
-            <a:pPr algn="r" indent="0" marL="0">
+            <a:pPr marL="0" indent="0" algn="r">
               <a:buNone/>
             </a:pPr>
             <a:r>
@@ -12387,6 +12172,7 @@
         <a:solidFill>
           <a:srgbClr val="FFFFFF"/>
         </a:solidFill>
+        <a:effectLst/>
       </p:bgPr>
     </p:bg>
     <p:spTree>
@@ -12424,11 +12210,11 @@
           <a:bodyPr wrap="square" lIns="0" tIns="0" rIns="0" bIns="0" rtlCol="0" anchor="ctr"/>
           <a:lstStyle/>
           <a:p>
-            <a:pPr indent="0" marL="0">
-              <a:buNone/>
-            </a:pPr>
-            <a:r>
-              <a:rPr lang="en-US" sz="1200" b="1" spc="150" kern="0" dirty="0">
+            <a:pPr marL="0" indent="0">
+              <a:buNone/>
+            </a:pPr>
+            <a:r>
+              <a:rPr lang="en-US" sz="1200" b="1" kern="0" spc="150" dirty="0">
                 <a:solidFill>
                   <a:srgbClr val="1C7293"/>
                 </a:solidFill>
@@ -12463,7 +12249,7 @@
           <a:bodyPr wrap="square" lIns="0" tIns="0" rIns="0" bIns="0" rtlCol="0" anchor="ctr"/>
           <a:lstStyle/>
           <a:p>
-            <a:pPr indent="0" marL="0">
+            <a:pPr marL="0" indent="0">
               <a:buNone/>
             </a:pPr>
             <a:r>
@@ -12502,7 +12288,7 @@
           <a:bodyPr wrap="square" lIns="0" tIns="0" rIns="0" bIns="0" rtlCol="0" anchor="ctr"/>
           <a:lstStyle/>
           <a:p>
-            <a:pPr indent="0" marL="0">
+            <a:pPr marL="0" indent="0">
               <a:lnSpc>
                 <a:spcPct val="130000"/>
               </a:lnSpc>
@@ -12564,7 +12350,7 @@
           <a:bodyPr wrap="square" lIns="0" tIns="0" rIns="0" bIns="0" rtlCol="0" anchor="ctr"/>
           <a:lstStyle/>
           <a:p>
-            <a:pPr algn="ctr" indent="0" marL="0">
+            <a:pPr marL="0" indent="0" algn="ctr">
               <a:buNone/>
             </a:pPr>
             <a:r>
@@ -12603,7 +12389,7 @@
           <a:bodyPr wrap="square" lIns="0" tIns="0" rIns="0" bIns="0" rtlCol="0" anchor="ctr"/>
           <a:lstStyle/>
           <a:p>
-            <a:pPr indent="0" marL="0">
+            <a:pPr marL="0" indent="0">
               <a:buNone/>
             </a:pPr>
             <a:r>
@@ -12642,7 +12428,7 @@
           <a:bodyPr wrap="square" lIns="0" tIns="0" rIns="0" bIns="0" rtlCol="0" anchor="ctr"/>
           <a:lstStyle/>
           <a:p>
-            <a:pPr indent="0" marL="0">
+            <a:pPr marL="0" indent="0">
               <a:buNone/>
             </a:pPr>
             <a:r>
@@ -12701,7 +12487,7 @@
           <a:bodyPr wrap="square" lIns="0" tIns="0" rIns="0" bIns="0" rtlCol="0" anchor="ctr"/>
           <a:lstStyle/>
           <a:p>
-            <a:pPr algn="ctr" indent="0" marL="0">
+            <a:pPr marL="0" indent="0" algn="ctr">
               <a:buNone/>
             </a:pPr>
             <a:r>
@@ -12740,7 +12526,7 @@
           <a:bodyPr wrap="square" lIns="0" tIns="0" rIns="0" bIns="0" rtlCol="0" anchor="ctr"/>
           <a:lstStyle/>
           <a:p>
-            <a:pPr indent="0" marL="0">
+            <a:pPr marL="0" indent="0">
               <a:buNone/>
             </a:pPr>
             <a:r>
@@ -12779,7 +12565,7 @@
           <a:bodyPr wrap="square" lIns="0" tIns="0" rIns="0" bIns="0" rtlCol="0" anchor="ctr"/>
           <a:lstStyle/>
           <a:p>
-            <a:pPr indent="0" marL="0">
+            <a:pPr marL="0" indent="0">
               <a:buNone/>
             </a:pPr>
             <a:r>
@@ -12823,7 +12609,7 @@
             <a:prstDash val="solid"/>
           </a:ln>
           <a:effectLst>
-            <a:outerShdw sx="100000" sy="100000" kx="0" ky="0" algn="bl" rotWithShape="0" blurRad="101600" dist="38100" dir="5400000">
+            <a:outerShdw blurRad="101600" dist="38100" dir="5400000" algn="bl" rotWithShape="0">
               <a:srgbClr val="000000">
                 <a:alpha val="25000"/>
               </a:srgbClr>
@@ -12852,7 +12638,7 @@
           <a:bodyPr wrap="square" lIns="0" tIns="0" rIns="0" bIns="0" rtlCol="0" anchor="t"/>
           <a:lstStyle/>
           <a:p>
-            <a:pPr indent="0" marL="0">
+            <a:pPr marL="0" indent="0">
               <a:lnSpc>
                 <a:spcPct val="115000"/>
               </a:lnSpc>
@@ -12872,7 +12658,7 @@
             <a:endParaRPr lang="en-US" sz="1600" dirty="0"/>
           </a:p>
           <a:p>
-            <a:pPr indent="0" marL="0">
+            <a:pPr marL="0" indent="0">
               <a:lnSpc>
                 <a:spcPct val="115000"/>
               </a:lnSpc>
@@ -12892,7 +12678,7 @@
             <a:endParaRPr lang="en-US" sz="1600" dirty="0"/>
           </a:p>
           <a:p>
-            <a:pPr indent="0" marL="0">
+            <a:pPr marL="0" indent="0">
               <a:lnSpc>
                 <a:spcPct val="115000"/>
               </a:lnSpc>
@@ -12912,7 +12698,7 @@
             <a:endParaRPr lang="en-US" sz="1600" dirty="0"/>
           </a:p>
           <a:p>
-            <a:pPr indent="0" marL="0">
+            <a:pPr marL="0" indent="0">
               <a:lnSpc>
                 <a:spcPct val="115000"/>
               </a:lnSpc>
@@ -12954,11 +12740,11 @@
           <a:bodyPr wrap="square" lIns="0" tIns="0" rIns="0" bIns="0" rtlCol="0" anchor="ctr"/>
           <a:lstStyle/>
           <a:p>
-            <a:pPr indent="0" marL="0">
-              <a:buNone/>
-            </a:pPr>
-            <a:r>
-              <a:rPr lang="en-US" sz="900" spc="100" kern="0" dirty="0">
+            <a:pPr marL="0" indent="0">
+              <a:buNone/>
+            </a:pPr>
+            <a:r>
+              <a:rPr lang="en-US" sz="900" kern="0" spc="100" dirty="0">
                 <a:solidFill>
                   <a:srgbClr val="A7AEC2"/>
                 </a:solidFill>
@@ -12993,7 +12779,7 @@
           <a:bodyPr wrap="square" lIns="0" tIns="0" rIns="0" bIns="0" rtlCol="0" anchor="ctr"/>
           <a:lstStyle/>
           <a:p>
-            <a:pPr algn="r" indent="0" marL="0">
+            <a:pPr marL="0" indent="0" algn="r">
               <a:buNone/>
             </a:pPr>
             <a:r>
@@ -13027,6 +12813,7 @@
         <a:solidFill>
           <a:srgbClr val="FFFFFF"/>
         </a:solidFill>
+        <a:effectLst/>
       </p:bgPr>
     </p:bg>
     <p:spTree>
@@ -13064,11 +12851,11 @@
           <a:bodyPr wrap="square" lIns="0" tIns="0" rIns="0" bIns="0" rtlCol="0" anchor="ctr"/>
           <a:lstStyle/>
           <a:p>
-            <a:pPr indent="0" marL="0">
-              <a:buNone/>
-            </a:pPr>
-            <a:r>
-              <a:rPr lang="en-US" sz="1200" b="1" spc="150" kern="0" dirty="0">
+            <a:pPr marL="0" indent="0">
+              <a:buNone/>
+            </a:pPr>
+            <a:r>
+              <a:rPr lang="en-US" sz="1200" b="1" kern="0" spc="150" dirty="0">
                 <a:solidFill>
                   <a:srgbClr val="1C7293"/>
                 </a:solidFill>
@@ -13103,7 +12890,7 @@
           <a:bodyPr wrap="square" lIns="0" tIns="0" rIns="0" bIns="0" rtlCol="0" anchor="ctr"/>
           <a:lstStyle/>
           <a:p>
-            <a:pPr indent="0" marL="0">
+            <a:pPr marL="0" indent="0">
               <a:buNone/>
             </a:pPr>
             <a:r>
@@ -13142,7 +12929,7 @@
           <a:bodyPr wrap="square" lIns="0" tIns="0" rIns="0" bIns="0" rtlCol="0" anchor="ctr"/>
           <a:lstStyle/>
           <a:p>
-            <a:pPr indent="0" marL="0">
+            <a:pPr marL="0" indent="0">
               <a:lnSpc>
                 <a:spcPct val="130000"/>
               </a:lnSpc>
@@ -13189,7 +12976,7 @@
             <a:prstDash val="solid"/>
           </a:ln>
           <a:effectLst>
-            <a:outerShdw sx="100000" sy="100000" kx="0" ky="0" algn="bl" rotWithShape="0" blurRad="101600" dist="38100" dir="5400000">
+            <a:outerShdw blurRad="101600" dist="38100" dir="5400000" algn="bl" rotWithShape="0">
               <a:srgbClr val="000000">
                 <a:alpha val="25000"/>
               </a:srgbClr>
@@ -13218,7 +13005,7 @@
           <a:bodyPr wrap="square" lIns="0" tIns="0" rIns="0" bIns="0" rtlCol="0" anchor="t"/>
           <a:lstStyle/>
           <a:p>
-            <a:pPr indent="0" marL="0">
+            <a:pPr marL="0" indent="0">
               <a:lnSpc>
                 <a:spcPct val="115000"/>
               </a:lnSpc>
@@ -13238,7 +13025,7 @@
             <a:endParaRPr lang="en-US" sz="1500" dirty="0"/>
           </a:p>
           <a:p>
-            <a:pPr indent="0" marL="0">
+            <a:pPr marL="0" indent="0">
               <a:lnSpc>
                 <a:spcPct val="115000"/>
               </a:lnSpc>
@@ -13247,7 +13034,7 @@
             <a:endParaRPr lang="en-US" sz="1500" dirty="0"/>
           </a:p>
           <a:p>
-            <a:pPr indent="0" marL="0">
+            <a:pPr marL="0" indent="0">
               <a:lnSpc>
                 <a:spcPct val="115000"/>
               </a:lnSpc>
@@ -13309,7 +13096,7 @@
           <a:bodyPr wrap="square" lIns="0" tIns="0" rIns="0" bIns="0" rtlCol="0" anchor="ctr"/>
           <a:lstStyle/>
           <a:p>
-            <a:pPr indent="0" marL="0">
+            <a:pPr marL="0" indent="0">
               <a:buNone/>
             </a:pPr>
             <a:r>
@@ -13353,7 +13140,7 @@
             <a:prstDash val="solid"/>
           </a:ln>
           <a:effectLst>
-            <a:outerShdw sx="100000" sy="100000" kx="0" ky="0" algn="bl" rotWithShape="0" blurRad="101600" dist="38100" dir="5400000">
+            <a:outerShdw blurRad="101600" dist="38100" dir="5400000" algn="bl" rotWithShape="0">
               <a:srgbClr val="000000">
                 <a:alpha val="25000"/>
               </a:srgbClr>
@@ -13382,7 +13169,7 @@
           <a:bodyPr wrap="square" lIns="0" tIns="0" rIns="0" bIns="0" rtlCol="0" anchor="t"/>
           <a:lstStyle/>
           <a:p>
-            <a:pPr indent="0" marL="0">
+            <a:pPr marL="0" indent="0">
               <a:lnSpc>
                 <a:spcPct val="115000"/>
               </a:lnSpc>
@@ -13402,7 +13189,7 @@
             <a:endParaRPr lang="en-US" sz="1500" dirty="0"/>
           </a:p>
           <a:p>
-            <a:pPr indent="0" marL="0">
+            <a:pPr marL="0" indent="0">
               <a:lnSpc>
                 <a:spcPct val="115000"/>
               </a:lnSpc>
@@ -13422,7 +13209,7 @@
             <a:endParaRPr lang="en-US" sz="1500" dirty="0"/>
           </a:p>
           <a:p>
-            <a:pPr indent="0" marL="0">
+            <a:pPr marL="0" indent="0">
               <a:lnSpc>
                 <a:spcPct val="115000"/>
               </a:lnSpc>
@@ -13442,7 +13229,7 @@
             <a:endParaRPr lang="en-US" sz="1500" dirty="0"/>
           </a:p>
           <a:p>
-            <a:pPr indent="0" marL="0">
+            <a:pPr marL="0" indent="0">
               <a:lnSpc>
                 <a:spcPct val="115000"/>
               </a:lnSpc>
@@ -13484,11 +13271,11 @@
           <a:bodyPr wrap="square" lIns="0" tIns="0" rIns="0" bIns="0" rtlCol="0" anchor="ctr"/>
           <a:lstStyle/>
           <a:p>
-            <a:pPr indent="0" marL="0">
-              <a:buNone/>
-            </a:pPr>
-            <a:r>
-              <a:rPr lang="en-US" sz="900" spc="100" kern="0" dirty="0">
+            <a:pPr marL="0" indent="0">
+              <a:buNone/>
+            </a:pPr>
+            <a:r>
+              <a:rPr lang="en-US" sz="900" kern="0" spc="100" dirty="0">
                 <a:solidFill>
                   <a:srgbClr val="A7AEC2"/>
                 </a:solidFill>
@@ -13523,7 +13310,7 @@
           <a:bodyPr wrap="square" lIns="0" tIns="0" rIns="0" bIns="0" rtlCol="0" anchor="ctr"/>
           <a:lstStyle/>
           <a:p>
-            <a:pPr algn="r" indent="0" marL="0">
+            <a:pPr marL="0" indent="0" algn="r">
               <a:buNone/>
             </a:pPr>
             <a:r>
@@ -13557,6 +13344,7 @@
         <a:solidFill>
           <a:srgbClr val="FFFFFF"/>
         </a:solidFill>
+        <a:effectLst/>
       </p:bgPr>
     </p:bg>
     <p:spTree>
@@ -13594,11 +13382,11 @@
           <a:bodyPr wrap="square" lIns="0" tIns="0" rIns="0" bIns="0" rtlCol="0" anchor="ctr"/>
           <a:lstStyle/>
           <a:p>
-            <a:pPr indent="0" marL="0">
-              <a:buNone/>
-            </a:pPr>
-            <a:r>
-              <a:rPr lang="en-US" sz="1200" b="1" spc="150" kern="0" dirty="0">
+            <a:pPr marL="0" indent="0">
+              <a:buNone/>
+            </a:pPr>
+            <a:r>
+              <a:rPr lang="en-US" sz="1200" b="1" kern="0" spc="150" dirty="0">
                 <a:solidFill>
                   <a:srgbClr val="1C7293"/>
                 </a:solidFill>
@@ -13633,7 +13421,7 @@
           <a:bodyPr wrap="square" lIns="0" tIns="0" rIns="0" bIns="0" rtlCol="0" anchor="ctr"/>
           <a:lstStyle/>
           <a:p>
-            <a:pPr indent="0" marL="0">
+            <a:pPr marL="0" indent="0">
               <a:buNone/>
             </a:pPr>
             <a:r>
@@ -13677,7 +13465,7 @@
             <a:prstDash val="solid"/>
           </a:ln>
           <a:effectLst>
-            <a:outerShdw sx="100000" sy="100000" kx="0" ky="0" algn="bl" rotWithShape="0" blurRad="101600" dist="38100" dir="5400000">
+            <a:outerShdw blurRad="101600" dist="38100" dir="5400000" algn="bl" rotWithShape="0">
               <a:srgbClr val="000000">
                 <a:alpha val="25000"/>
               </a:srgbClr>
@@ -13706,7 +13494,7 @@
           <a:bodyPr wrap="square" lIns="0" tIns="0" rIns="0" bIns="0" rtlCol="0" anchor="t"/>
           <a:lstStyle/>
           <a:p>
-            <a:pPr indent="0" marL="0">
+            <a:pPr marL="0" indent="0">
               <a:lnSpc>
                 <a:spcPct val="115000"/>
               </a:lnSpc>
@@ -13726,7 +13514,7 @@
             <a:endParaRPr lang="en-US" sz="1250" dirty="0"/>
           </a:p>
           <a:p>
-            <a:pPr indent="0" marL="0">
+            <a:pPr marL="0" indent="0">
               <a:lnSpc>
                 <a:spcPct val="115000"/>
               </a:lnSpc>
@@ -13735,7 +13523,7 @@
             <a:endParaRPr lang="en-US" sz="1250" dirty="0"/>
           </a:p>
           <a:p>
-            <a:pPr indent="0" marL="0">
+            <a:pPr marL="0" indent="0">
               <a:lnSpc>
                 <a:spcPct val="115000"/>
               </a:lnSpc>
@@ -13755,7 +13543,7 @@
             <a:endParaRPr lang="en-US" sz="1250" dirty="0"/>
           </a:p>
           <a:p>
-            <a:pPr indent="0" marL="0">
+            <a:pPr marL="0" indent="0">
               <a:lnSpc>
                 <a:spcPct val="115000"/>
               </a:lnSpc>
@@ -13775,7 +13563,7 @@
             <a:endParaRPr lang="en-US" sz="1250" dirty="0"/>
           </a:p>
           <a:p>
-            <a:pPr indent="0" marL="0">
+            <a:pPr marL="0" indent="0">
               <a:lnSpc>
                 <a:spcPct val="115000"/>
               </a:lnSpc>
@@ -13784,7 +13572,7 @@
             <a:endParaRPr lang="en-US" sz="1250" dirty="0"/>
           </a:p>
           <a:p>
-            <a:pPr indent="0" marL="0">
+            <a:pPr marL="0" indent="0">
               <a:lnSpc>
                 <a:spcPct val="115000"/>
               </a:lnSpc>
@@ -13804,7 +13592,7 @@
             <a:endParaRPr lang="en-US" sz="1250" dirty="0"/>
           </a:p>
           <a:p>
-            <a:pPr indent="0" marL="0">
+            <a:pPr marL="0" indent="0">
               <a:lnSpc>
                 <a:spcPct val="115000"/>
               </a:lnSpc>
@@ -13824,7 +13612,7 @@
             <a:endParaRPr lang="en-US" sz="1250" dirty="0"/>
           </a:p>
           <a:p>
-            <a:pPr indent="0" marL="0">
+            <a:pPr marL="0" indent="0">
               <a:lnSpc>
                 <a:spcPct val="115000"/>
               </a:lnSpc>
@@ -13844,7 +13632,7 @@
             <a:endParaRPr lang="en-US" sz="1250" dirty="0"/>
           </a:p>
           <a:p>
-            <a:pPr indent="0" marL="0">
+            <a:pPr marL="0" indent="0">
               <a:lnSpc>
                 <a:spcPct val="115000"/>
               </a:lnSpc>
@@ -13853,7 +13641,7 @@
             <a:endParaRPr lang="en-US" sz="1250" dirty="0"/>
           </a:p>
           <a:p>
-            <a:pPr indent="0" marL="0">
+            <a:pPr marL="0" indent="0">
               <a:lnSpc>
                 <a:spcPct val="115000"/>
               </a:lnSpc>
@@ -13873,7 +13661,7 @@
             <a:endParaRPr lang="en-US" sz="1250" dirty="0"/>
           </a:p>
           <a:p>
-            <a:pPr indent="0" marL="0">
+            <a:pPr marL="0" indent="0">
               <a:lnSpc>
                 <a:spcPct val="115000"/>
               </a:lnSpc>
@@ -13893,7 +13681,7 @@
             <a:endParaRPr lang="en-US" sz="1250" dirty="0"/>
           </a:p>
           <a:p>
-            <a:pPr indent="0" marL="0">
+            <a:pPr marL="0" indent="0">
               <a:lnSpc>
                 <a:spcPct val="115000"/>
               </a:lnSpc>
@@ -13913,7 +13701,7 @@
             <a:endParaRPr lang="en-US" sz="1250" dirty="0"/>
           </a:p>
           <a:p>
-            <a:pPr indent="0" marL="0">
+            <a:pPr marL="0" indent="0">
               <a:lnSpc>
                 <a:spcPct val="115000"/>
               </a:lnSpc>
@@ -13933,7 +13721,7 @@
             <a:endParaRPr lang="en-US" sz="1250" dirty="0"/>
           </a:p>
           <a:p>
-            <a:pPr indent="0" marL="0">
+            <a:pPr marL="0" indent="0">
               <a:lnSpc>
                 <a:spcPct val="115000"/>
               </a:lnSpc>
@@ -13953,7 +13741,7 @@
             <a:endParaRPr lang="en-US" sz="1250" dirty="0"/>
           </a:p>
           <a:p>
-            <a:pPr indent="0" marL="0">
+            <a:pPr marL="0" indent="0">
               <a:lnSpc>
                 <a:spcPct val="115000"/>
               </a:lnSpc>
@@ -13973,7 +13761,7 @@
             <a:endParaRPr lang="en-US" sz="1250" dirty="0"/>
           </a:p>
           <a:p>
-            <a:pPr indent="0" marL="0">
+            <a:pPr marL="0" indent="0">
               <a:lnSpc>
                 <a:spcPct val="115000"/>
               </a:lnSpc>
@@ -13993,7 +13781,7 @@
             <a:endParaRPr lang="en-US" sz="1250" dirty="0"/>
           </a:p>
           <a:p>
-            <a:pPr indent="0" marL="0">
+            <a:pPr marL="0" indent="0">
               <a:lnSpc>
                 <a:spcPct val="115000"/>
               </a:lnSpc>
@@ -14055,7 +13843,7 @@
           <a:bodyPr wrap="square" lIns="0" tIns="0" rIns="0" bIns="0" rtlCol="0" anchor="ctr"/>
           <a:lstStyle/>
           <a:p>
-            <a:pPr algn="ctr" indent="0" marL="0">
+            <a:pPr marL="0" indent="0" algn="ctr">
               <a:buNone/>
             </a:pPr>
             <a:r>
@@ -14094,7 +13882,7 @@
           <a:bodyPr wrap="square" lIns="0" tIns="0" rIns="0" bIns="0" rtlCol="0" anchor="ctr"/>
           <a:lstStyle/>
           <a:p>
-            <a:pPr indent="0" marL="0">
+            <a:pPr marL="0" indent="0">
               <a:buNone/>
             </a:pPr>
             <a:r>
@@ -14133,7 +13921,7 @@
           <a:bodyPr wrap="square" lIns="0" tIns="0" rIns="0" bIns="0" rtlCol="0" anchor="ctr"/>
           <a:lstStyle/>
           <a:p>
-            <a:pPr indent="0" marL="0">
+            <a:pPr marL="0" indent="0">
               <a:buNone/>
             </a:pPr>
             <a:r>
@@ -14192,7 +13980,7 @@
           <a:bodyPr wrap="square" lIns="0" tIns="0" rIns="0" bIns="0" rtlCol="0" anchor="ctr"/>
           <a:lstStyle/>
           <a:p>
-            <a:pPr algn="ctr" indent="0" marL="0">
+            <a:pPr marL="0" indent="0" algn="ctr">
               <a:buNone/>
             </a:pPr>
             <a:r>
@@ -14231,7 +14019,7 @@
           <a:bodyPr wrap="square" lIns="0" tIns="0" rIns="0" bIns="0" rtlCol="0" anchor="ctr"/>
           <a:lstStyle/>
           <a:p>
-            <a:pPr indent="0" marL="0">
+            <a:pPr marL="0" indent="0">
               <a:buNone/>
             </a:pPr>
             <a:r>
@@ -14270,7 +14058,7 @@
           <a:bodyPr wrap="square" lIns="0" tIns="0" rIns="0" bIns="0" rtlCol="0" anchor="ctr"/>
           <a:lstStyle/>
           <a:p>
-            <a:pPr indent="0" marL="0">
+            <a:pPr marL="0" indent="0">
               <a:buNone/>
             </a:pPr>
             <a:r>
@@ -14329,7 +14117,7 @@
           <a:bodyPr wrap="square" lIns="0" tIns="0" rIns="0" bIns="0" rtlCol="0" anchor="ctr"/>
           <a:lstStyle/>
           <a:p>
-            <a:pPr algn="ctr" indent="0" marL="0">
+            <a:pPr marL="0" indent="0" algn="ctr">
               <a:buNone/>
             </a:pPr>
             <a:r>
@@ -14368,7 +14156,7 @@
           <a:bodyPr wrap="square" lIns="0" tIns="0" rIns="0" bIns="0" rtlCol="0" anchor="ctr"/>
           <a:lstStyle/>
           <a:p>
-            <a:pPr indent="0" marL="0">
+            <a:pPr marL="0" indent="0">
               <a:buNone/>
             </a:pPr>
             <a:r>
@@ -14407,7 +14195,7 @@
           <a:bodyPr wrap="square" lIns="0" tIns="0" rIns="0" bIns="0" rtlCol="0" anchor="ctr"/>
           <a:lstStyle/>
           <a:p>
-            <a:pPr indent="0" marL="0">
+            <a:pPr marL="0" indent="0">
               <a:buNone/>
             </a:pPr>
             <a:r>
@@ -14466,7 +14254,7 @@
           <a:bodyPr wrap="square" lIns="0" tIns="0" rIns="0" bIns="0" rtlCol="0" anchor="ctr"/>
           <a:lstStyle/>
           <a:p>
-            <a:pPr algn="ctr" indent="0" marL="0">
+            <a:pPr marL="0" indent="0" algn="ctr">
               <a:buNone/>
             </a:pPr>
             <a:r>
@@ -14505,7 +14293,7 @@
           <a:bodyPr wrap="square" lIns="0" tIns="0" rIns="0" bIns="0" rtlCol="0" anchor="ctr"/>
           <a:lstStyle/>
           <a:p>
-            <a:pPr indent="0" marL="0">
+            <a:pPr marL="0" indent="0">
               <a:buNone/>
             </a:pPr>
             <a:r>
@@ -14544,7 +14332,7 @@
           <a:bodyPr wrap="square" lIns="0" tIns="0" rIns="0" bIns="0" rtlCol="0" anchor="ctr"/>
           <a:lstStyle/>
           <a:p>
-            <a:pPr indent="0" marL="0">
+            <a:pPr marL="0" indent="0">
               <a:buNone/>
             </a:pPr>
             <a:r>
@@ -14583,11 +14371,11 @@
           <a:bodyPr wrap="square" lIns="0" tIns="0" rIns="0" bIns="0" rtlCol="0" anchor="ctr"/>
           <a:lstStyle/>
           <a:p>
-            <a:pPr indent="0" marL="0">
-              <a:buNone/>
-            </a:pPr>
-            <a:r>
-              <a:rPr lang="en-US" sz="900" spc="100" kern="0" dirty="0">
+            <a:pPr marL="0" indent="0">
+              <a:buNone/>
+            </a:pPr>
+            <a:r>
+              <a:rPr lang="en-US" sz="900" kern="0" spc="100" dirty="0">
                 <a:solidFill>
                   <a:srgbClr val="A7AEC2"/>
                 </a:solidFill>
@@ -14622,7 +14410,7 @@
           <a:bodyPr wrap="square" lIns="0" tIns="0" rIns="0" bIns="0" rtlCol="0" anchor="ctr"/>
           <a:lstStyle/>
           <a:p>
-            <a:pPr algn="r" indent="0" marL="0">
+            <a:pPr marL="0" indent="0" algn="r">
               <a:buNone/>
             </a:pPr>
             <a:r>
@@ -14656,6 +14444,7 @@
         <a:solidFill>
           <a:srgbClr val="FFFFFF"/>
         </a:solidFill>
+        <a:effectLst/>
       </p:bgPr>
     </p:bg>
     <p:spTree>
@@ -14693,11 +14482,11 @@
           <a:bodyPr wrap="square" lIns="0" tIns="0" rIns="0" bIns="0" rtlCol="0" anchor="ctr"/>
           <a:lstStyle/>
           <a:p>
-            <a:pPr indent="0" marL="0">
-              <a:buNone/>
-            </a:pPr>
-            <a:r>
-              <a:rPr lang="en-US" sz="1200" b="1" spc="150" kern="0" dirty="0">
+            <a:pPr marL="0" indent="0">
+              <a:buNone/>
+            </a:pPr>
+            <a:r>
+              <a:rPr lang="en-US" sz="1200" b="1" kern="0" spc="150" dirty="0">
                 <a:solidFill>
                   <a:srgbClr val="1C7293"/>
                 </a:solidFill>
@@ -14732,7 +14521,7 @@
           <a:bodyPr wrap="square" lIns="0" tIns="0" rIns="0" bIns="0" rtlCol="0" anchor="ctr"/>
           <a:lstStyle/>
           <a:p>
-            <a:pPr indent="0" marL="0">
+            <a:pPr marL="0" indent="0">
               <a:buNone/>
             </a:pPr>
             <a:r>
@@ -14771,7 +14560,7 @@
           <a:bodyPr wrap="square" lIns="0" tIns="0" rIns="0" bIns="0" rtlCol="0" anchor="ctr"/>
           <a:lstStyle/>
           <a:p>
-            <a:pPr indent="0" marL="0">
+            <a:pPr marL="0" indent="0">
               <a:lnSpc>
                 <a:spcPct val="130000"/>
               </a:lnSpc>
@@ -14818,7 +14607,7 @@
             <a:prstDash val="solid"/>
           </a:ln>
           <a:effectLst>
-            <a:outerShdw sx="100000" sy="100000" kx="0" ky="0" algn="bl" rotWithShape="0" blurRad="101600" dist="38100" dir="5400000">
+            <a:outerShdw blurRad="101600" dist="38100" dir="5400000" algn="bl" rotWithShape="0">
               <a:srgbClr val="000000">
                 <a:alpha val="25000"/>
               </a:srgbClr>
@@ -14847,7 +14636,7 @@
           <a:bodyPr wrap="square" lIns="0" tIns="0" rIns="0" bIns="0" rtlCol="0" anchor="t"/>
           <a:lstStyle/>
           <a:p>
-            <a:pPr indent="0" marL="0">
+            <a:pPr marL="0" indent="0">
               <a:lnSpc>
                 <a:spcPct val="115000"/>
               </a:lnSpc>
@@ -14894,7 +14683,7 @@
             <a:prstDash val="solid"/>
           </a:ln>
           <a:effectLst>
-            <a:outerShdw sx="100000" sy="100000" kx="0" ky="0" algn="bl" rotWithShape="0" blurRad="101600" dist="38100" dir="5400000">
+            <a:outerShdw blurRad="101600" dist="38100" dir="5400000" algn="bl" rotWithShape="0">
               <a:srgbClr val="000000">
                 <a:alpha val="25000"/>
               </a:srgbClr>
@@ -14923,7 +14712,7 @@
           <a:bodyPr wrap="square" lIns="0" tIns="0" rIns="0" bIns="0" rtlCol="0" anchor="t"/>
           <a:lstStyle/>
           <a:p>
-            <a:pPr indent="0" marL="0">
+            <a:pPr marL="0" indent="0">
               <a:lnSpc>
                 <a:spcPct val="115000"/>
               </a:lnSpc>
@@ -14943,7 +14732,7 @@
             <a:endParaRPr lang="en-US" sz="1500" dirty="0"/>
           </a:p>
           <a:p>
-            <a:pPr indent="0" marL="0">
+            <a:pPr marL="0" indent="0">
               <a:lnSpc>
                 <a:spcPct val="115000"/>
               </a:lnSpc>
@@ -14963,7 +14752,7 @@
             <a:endParaRPr lang="en-US" sz="1500" dirty="0"/>
           </a:p>
           <a:p>
-            <a:pPr indent="0" marL="0">
+            <a:pPr marL="0" indent="0">
               <a:lnSpc>
                 <a:spcPct val="115000"/>
               </a:lnSpc>
@@ -15027,7 +14816,7 @@
           <a:bodyPr wrap="square" lIns="0" tIns="0" rIns="0" bIns="0" rtlCol="0" anchor="ctr"/>
           <a:lstStyle/>
           <a:p>
-            <a:pPr algn="ctr" indent="0" marL="0">
+            <a:pPr marL="0" indent="0" algn="ctr">
               <a:buNone/>
             </a:pPr>
             <a:r>
@@ -15108,7 +14897,7 @@
           <a:bodyPr wrap="square" lIns="0" tIns="0" rIns="0" bIns="0" rtlCol="0" anchor="ctr"/>
           <a:lstStyle/>
           <a:p>
-            <a:pPr algn="ctr" indent="0" marL="0">
+            <a:pPr marL="0" indent="0" algn="ctr">
               <a:buNone/>
             </a:pPr>
             <a:r>
@@ -15189,7 +14978,7 @@
           <a:bodyPr wrap="square" lIns="0" tIns="0" rIns="0" bIns="0" rtlCol="0" anchor="ctr"/>
           <a:lstStyle/>
           <a:p>
-            <a:pPr algn="ctr" indent="0" marL="0">
+            <a:pPr marL="0" indent="0" algn="ctr">
               <a:buNone/>
             </a:pPr>
             <a:r>
@@ -15228,11 +15017,11 @@
           <a:bodyPr wrap="square" lIns="0" tIns="0" rIns="0" bIns="0" rtlCol="0" anchor="ctr"/>
           <a:lstStyle/>
           <a:p>
-            <a:pPr indent="0" marL="0">
-              <a:buNone/>
-            </a:pPr>
-            <a:r>
-              <a:rPr lang="en-US" sz="900" spc="100" kern="0" dirty="0">
+            <a:pPr marL="0" indent="0">
+              <a:buNone/>
+            </a:pPr>
+            <a:r>
+              <a:rPr lang="en-US" sz="900" kern="0" spc="100" dirty="0">
                 <a:solidFill>
                   <a:srgbClr val="A7AEC2"/>
                 </a:solidFill>
@@ -15267,7 +15056,7 @@
           <a:bodyPr wrap="square" lIns="0" tIns="0" rIns="0" bIns="0" rtlCol="0" anchor="ctr"/>
           <a:lstStyle/>
           <a:p>
-            <a:pPr algn="r" indent="0" marL="0">
+            <a:pPr marL="0" indent="0" algn="r">
               <a:buNone/>
             </a:pPr>
             <a:r>
@@ -15301,6 +15090,7 @@
         <a:solidFill>
           <a:srgbClr val="FFFFFF"/>
         </a:solidFill>
+        <a:effectLst/>
       </p:bgPr>
     </p:bg>
     <p:spTree>
@@ -15338,11 +15128,11 @@
           <a:bodyPr wrap="square" lIns="0" tIns="0" rIns="0" bIns="0" rtlCol="0" anchor="ctr"/>
           <a:lstStyle/>
           <a:p>
-            <a:pPr indent="0" marL="0">
-              <a:buNone/>
-            </a:pPr>
-            <a:r>
-              <a:rPr lang="en-US" sz="1200" b="1" spc="150" kern="0" dirty="0">
+            <a:pPr marL="0" indent="0">
+              <a:buNone/>
+            </a:pPr>
+            <a:r>
+              <a:rPr lang="en-US" sz="1200" b="1" kern="0" spc="150" dirty="0">
                 <a:solidFill>
                   <a:srgbClr val="1C7293"/>
                 </a:solidFill>
@@ -15377,7 +15167,7 @@
           <a:bodyPr wrap="square" lIns="0" tIns="0" rIns="0" bIns="0" rtlCol="0" anchor="ctr"/>
           <a:lstStyle/>
           <a:p>
-            <a:pPr indent="0" marL="0">
+            <a:pPr marL="0" indent="0">
               <a:buNone/>
             </a:pPr>
             <a:r>
@@ -15416,7 +15206,7 @@
           <a:bodyPr wrap="square" lIns="0" tIns="0" rIns="0" bIns="0" rtlCol="0" anchor="ctr"/>
           <a:lstStyle/>
           <a:p>
-            <a:pPr indent="0" marL="0">
+            <a:pPr marL="0" indent="0">
               <a:buNone/>
             </a:pPr>
             <a:r>
@@ -15455,7 +15245,7 @@
           <a:bodyPr wrap="square" lIns="0" tIns="0" rIns="0" bIns="0" rtlCol="0" anchor="ctr"/>
           <a:lstStyle/>
           <a:p>
-            <a:pPr indent="0" marL="0">
+            <a:pPr marL="0" indent="0">
               <a:buNone/>
             </a:pPr>
             <a:r>
@@ -15496,8 +15286,20 @@
             <a:tbl>
               <a:tblPr/>
               <a:tblGrid>
-                <a:gridCol w="2560320"/>
-                <a:gridCol w="2560320"/>
+                <a:gridCol w="2560320">
+                  <a:extLst>
+                    <a:ext uri="{9D8B030D-6E8A-4147-A177-3AD203B41FA5}">
+                      <a16:colId xmlns:a16="http://schemas.microsoft.com/office/drawing/2014/main" val="20000"/>
+                    </a:ext>
+                  </a:extLst>
+                </a:gridCol>
+                <a:gridCol w="2560320">
+                  <a:extLst>
+                    <a:ext uri="{9D8B030D-6E8A-4147-A177-3AD203B41FA5}">
+                      <a16:colId xmlns:a16="http://schemas.microsoft.com/office/drawing/2014/main" val="20001"/>
+                    </a:ext>
+                  </a:extLst>
+                </a:gridCol>
               </a:tblGrid>
               <a:tr h="457200">
                 <a:tc>
@@ -15505,7 +15307,7 @@
                     <a:bodyPr/>
                     <a:lstStyle/>
                     <a:p>
-                      <a:pPr indent="0" marL="0">
+                      <a:pPr marL="0" indent="0">
                         <a:buNone/>
                       </a:pPr>
                       <a:r>
@@ -15526,7 +15328,7 @@
                       </a:endParaRPr>
                     </a:p>
                   </a:txBody>
-                  <a:tcPr marL="91440" marR="91440" marT="45720" marB="45720">
+                  <a:tcPr>
                     <a:lnL w="12700" cap="flat" cmpd="sng" algn="ctr">
                       <a:solidFill>
                         <a:srgbClr val="E3E7F0"/>
@@ -15573,7 +15375,7 @@
                     <a:bodyPr/>
                     <a:lstStyle/>
                     <a:p>
-                      <a:pPr indent="0" marL="0">
+                      <a:pPr marL="0" indent="0">
                         <a:buNone/>
                       </a:pPr>
                       <a:r>
@@ -15594,7 +15396,7 @@
                       </a:endParaRPr>
                     </a:p>
                   </a:txBody>
-                  <a:tcPr marL="91440" marR="91440" marT="45720" marB="45720">
+                  <a:tcPr>
                     <a:lnL w="12700" cap="flat" cmpd="sng" algn="ctr">
                       <a:solidFill>
                         <a:srgbClr val="E3E7F0"/>
@@ -15636,6 +15438,11 @@
                     </a:solidFill>
                   </a:tcPr>
                 </a:tc>
+                <a:extLst>
+                  <a:ext uri="{0D108BD9-81ED-4DB2-BD59-A6C34878D82A}">
+                    <a16:rowId xmlns:a16="http://schemas.microsoft.com/office/drawing/2014/main" val="10000"/>
+                  </a:ext>
+                </a:extLst>
               </a:tr>
               <a:tr h="457200">
                 <a:tc>
@@ -15643,7 +15450,7 @@
                     <a:bodyPr/>
                     <a:lstStyle/>
                     <a:p>
-                      <a:pPr indent="0" marL="0">
+                      <a:pPr marL="0" indent="0">
                         <a:buNone/>
                       </a:pPr>
                       <a:r>
@@ -15664,7 +15471,7 @@
                       </a:endParaRPr>
                     </a:p>
                   </a:txBody>
-                  <a:tcPr marL="91440" marR="91440" marT="45720" marB="45720">
+                  <a:tcPr>
                     <a:lnL w="12700" cap="flat" cmpd="sng" algn="ctr">
                       <a:solidFill>
                         <a:srgbClr val="E3E7F0"/>
@@ -15711,7 +15518,7 @@
                     <a:bodyPr/>
                     <a:lstStyle/>
                     <a:p>
-                      <a:pPr indent="0" marL="0">
+                      <a:pPr marL="0" indent="0">
                         <a:buNone/>
                       </a:pPr>
                       <a:r>
@@ -15732,7 +15539,7 @@
                       </a:endParaRPr>
                     </a:p>
                   </a:txBody>
-                  <a:tcPr marL="91440" marR="91440" marT="45720" marB="45720">
+                  <a:tcPr>
                     <a:lnL w="12700" cap="flat" cmpd="sng" algn="ctr">
                       <a:solidFill>
                         <a:srgbClr val="E3E7F0"/>
@@ -15774,6 +15581,11 @@
                     </a:solidFill>
                   </a:tcPr>
                 </a:tc>
+                <a:extLst>
+                  <a:ext uri="{0D108BD9-81ED-4DB2-BD59-A6C34878D82A}">
+                    <a16:rowId xmlns:a16="http://schemas.microsoft.com/office/drawing/2014/main" val="10001"/>
+                  </a:ext>
+                </a:extLst>
               </a:tr>
               <a:tr h="457200">
                 <a:tc>
@@ -15781,7 +15593,7 @@
                     <a:bodyPr/>
                     <a:lstStyle/>
                     <a:p>
-                      <a:pPr indent="0" marL="0">
+                      <a:pPr marL="0" indent="0">
                         <a:buNone/>
                       </a:pPr>
                       <a:r>
@@ -15802,7 +15614,7 @@
                       </a:endParaRPr>
                     </a:p>
                   </a:txBody>
-                  <a:tcPr marL="91440" marR="91440" marT="45720" marB="45720">
+                  <a:tcPr>
                     <a:lnL w="12700" cap="flat" cmpd="sng" algn="ctr">
                       <a:solidFill>
                         <a:srgbClr val="E3E7F0"/>
@@ -15849,7 +15661,7 @@
                     <a:bodyPr/>
                     <a:lstStyle/>
                     <a:p>
-                      <a:pPr indent="0" marL="0">
+                      <a:pPr marL="0" indent="0">
                         <a:buNone/>
                       </a:pPr>
                       <a:r>
@@ -15870,7 +15682,7 @@
                       </a:endParaRPr>
                     </a:p>
                   </a:txBody>
-                  <a:tcPr marL="91440" marR="91440" marT="45720" marB="45720">
+                  <a:tcPr>
                     <a:lnL w="12700" cap="flat" cmpd="sng" algn="ctr">
                       <a:solidFill>
                         <a:srgbClr val="E3E7F0"/>
@@ -15912,6 +15724,11 @@
                     </a:solidFill>
                   </a:tcPr>
                 </a:tc>
+                <a:extLst>
+                  <a:ext uri="{0D108BD9-81ED-4DB2-BD59-A6C34878D82A}">
+                    <a16:rowId xmlns:a16="http://schemas.microsoft.com/office/drawing/2014/main" val="10002"/>
+                  </a:ext>
+                </a:extLst>
               </a:tr>
             </a:tbl>
           </a:graphicData>
@@ -15958,7 +15775,7 @@
           <a:bodyPr wrap="square" lIns="0" tIns="0" rIns="0" bIns="0" rtlCol="0" anchor="ctr"/>
           <a:lstStyle/>
           <a:p>
-            <a:pPr indent="0" marL="0">
+            <a:pPr marL="0" indent="0">
               <a:buNone/>
             </a:pPr>
             <a:r>
@@ -16002,7 +15819,7 @@
             <a:prstDash val="solid"/>
           </a:ln>
           <a:effectLst>
-            <a:outerShdw sx="100000" sy="100000" kx="0" ky="0" algn="bl" rotWithShape="0" blurRad="101600" dist="38100" dir="5400000">
+            <a:outerShdw blurRad="101600" dist="38100" dir="5400000" algn="bl" rotWithShape="0">
               <a:srgbClr val="000000">
                 <a:alpha val="25000"/>
               </a:srgbClr>
@@ -16012,7 +15829,7 @@
       </p:sp>
       <p:sp>
         <p:nvSpPr>
-          <p:cNvPr id="10" name="Text 7"/>
+          <p:cNvPr id="6" name="Text 7"/>
           <p:cNvSpPr txBox="1"/>
           <p:nvPr/>
         </p:nvSpPr>
@@ -16031,7 +15848,7 @@
           <a:bodyPr wrap="square" lIns="0" tIns="0" rIns="0" bIns="0" rtlCol="0" anchor="t"/>
           <a:lstStyle/>
           <a:p>
-            <a:pPr indent="0" marL="0">
+            <a:pPr marL="0" indent="0">
               <a:lnSpc>
                 <a:spcPct val="115000"/>
               </a:lnSpc>
@@ -16051,7 +15868,7 @@
             <a:endParaRPr lang="en-US" sz="1500" dirty="0"/>
           </a:p>
           <a:p>
-            <a:pPr indent="0" marL="0">
+            <a:pPr marL="0" indent="0">
               <a:lnSpc>
                 <a:spcPct val="115000"/>
               </a:lnSpc>
@@ -16071,7 +15888,7 @@
             <a:endParaRPr lang="en-US" sz="1500" dirty="0"/>
           </a:p>
           <a:p>
-            <a:pPr indent="0" marL="0">
+            <a:pPr marL="0" indent="0">
               <a:lnSpc>
                 <a:spcPct val="115000"/>
               </a:lnSpc>
@@ -16091,7 +15908,7 @@
             <a:endParaRPr lang="en-US" sz="1500" dirty="0"/>
           </a:p>
           <a:p>
-            <a:pPr indent="0" marL="0">
+            <a:pPr marL="0" indent="0">
               <a:lnSpc>
                 <a:spcPct val="115000"/>
               </a:lnSpc>
@@ -16133,11 +15950,11 @@
           <a:bodyPr wrap="square" lIns="0" tIns="0" rIns="0" bIns="0" rtlCol="0" anchor="ctr"/>
           <a:lstStyle/>
           <a:p>
-            <a:pPr indent="0" marL="0">
-              <a:buNone/>
-            </a:pPr>
-            <a:r>
-              <a:rPr lang="en-US" sz="900" spc="100" kern="0" dirty="0">
+            <a:pPr marL="0" indent="0">
+              <a:buNone/>
+            </a:pPr>
+            <a:r>
+              <a:rPr lang="en-US" sz="900" kern="0" spc="100" dirty="0">
                 <a:solidFill>
                   <a:srgbClr val="A7AEC2"/>
                 </a:solidFill>
@@ -16172,7 +15989,7 @@
           <a:bodyPr wrap="square" lIns="0" tIns="0" rIns="0" bIns="0" rtlCol="0" anchor="ctr"/>
           <a:lstStyle/>
           <a:p>
-            <a:pPr algn="r" indent="0" marL="0">
+            <a:pPr marL="0" indent="0" algn="r">
               <a:buNone/>
             </a:pPr>
             <a:r>
@@ -16491,4 +16308,265 @@
     </a:ext>
   </a:extLst>
 </a:theme>
+</file>
+
+<file path=ppt/theme/theme2.xml><?xml version="1.0" encoding="utf-8"?>
+<a:theme xmlns:a="http://schemas.openxmlformats.org/drawingml/2006/main" name="Office Theme">
+  <a:themeElements>
+    <a:clrScheme name="Office">
+      <a:dk1>
+        <a:sysClr val="windowText" lastClr="000000"/>
+      </a:dk1>
+      <a:lt1>
+        <a:sysClr val="window" lastClr="FFFFFF"/>
+      </a:lt1>
+      <a:dk2>
+        <a:srgbClr val="44546A"/>
+      </a:dk2>
+      <a:lt2>
+        <a:srgbClr val="E7E6E6"/>
+      </a:lt2>
+      <a:accent1>
+        <a:srgbClr val="5B9BD5"/>
+      </a:accent1>
+      <a:accent2>
+        <a:srgbClr val="ED7D31"/>
+      </a:accent2>
+      <a:accent3>
+        <a:srgbClr val="A5A5A5"/>
+      </a:accent3>
+      <a:accent4>
+        <a:srgbClr val="FFC000"/>
+      </a:accent4>
+      <a:accent5>
+        <a:srgbClr val="4472C4"/>
+      </a:accent5>
+      <a:accent6>
+        <a:srgbClr val="70AD47"/>
+      </a:accent6>
+      <a:hlink>
+        <a:srgbClr val="0563C1"/>
+      </a:hlink>
+      <a:folHlink>
+        <a:srgbClr val="954F72"/>
+      </a:folHlink>
+    </a:clrScheme>
+    <a:fontScheme name="Office">
+      <a:majorFont>
+        <a:latin typeface="Calibri Light" panose="020F0302020204030204"/>
+        <a:ea typeface=""/>
+        <a:cs typeface=""/>
+        <a:font script="Jpan" typeface="游ゴシック Light"/>
+        <a:font script="Hang" typeface="맑은 고딕"/>
+        <a:font script="Hans" typeface="等线 Light"/>
+        <a:font script="Hant" typeface="新細明體"/>
+        <a:font script="Arab" typeface="Times New Roman"/>
+        <a:font script="Hebr" typeface="Times New Roman"/>
+        <a:font script="Thai" typeface="Angsana New"/>
+        <a:font script="Ethi" typeface="Nyala"/>
+        <a:font script="Beng" typeface="Vrinda"/>
+        <a:font script="Gujr" typeface="Shruti"/>
+        <a:font script="Khmr" typeface="MoolBoran"/>
+        <a:font script="Knda" typeface="Tunga"/>
+        <a:font script="Guru" typeface="Raavi"/>
+        <a:font script="Cans" typeface="Euphemia"/>
+        <a:font script="Cher" typeface="Plantagenet Cherokee"/>
+        <a:font script="Yiii" typeface="Microsoft Yi Baiti"/>
+        <a:font script="Tibt" typeface="Microsoft Himalaya"/>
+        <a:font script="Thaa" typeface="MV Boli"/>
+        <a:font script="Deva" typeface="Mangal"/>
+        <a:font script="Telu" typeface="Gautami"/>
+        <a:font script="Taml" typeface="Latha"/>
+        <a:font script="Syrc" typeface="Estrangelo Edessa"/>
+        <a:font script="Orya" typeface="Kalinga"/>
+        <a:font script="Mlym" typeface="Kartika"/>
+        <a:font script="Laoo" typeface="DokChampa"/>
+        <a:font script="Sinh" typeface="Iskoola Pota"/>
+        <a:font script="Mong" typeface="Mongolian Baiti"/>
+        <a:font script="Viet" typeface="Times New Roman"/>
+        <a:font script="Uigh" typeface="Microsoft Uighur"/>
+        <a:font script="Geor" typeface="Sylfaen"/>
+      </a:majorFont>
+      <a:minorFont>
+        <a:latin typeface="Calibri" panose="020F0502020204030204"/>
+        <a:ea typeface=""/>
+        <a:cs typeface=""/>
+        <a:font script="Jpan" typeface="游ゴシック"/>
+        <a:font script="Hang" typeface="맑은 고딕"/>
+        <a:font script="Hans" typeface="等线"/>
+        <a:font script="Hant" typeface="新細明體"/>
+        <a:font script="Arab" typeface="Arial"/>
+        <a:font script="Hebr" typeface="Arial"/>
+        <a:font script="Thai" typeface="Cordia New"/>
+        <a:font script="Ethi" typeface="Nyala"/>
+        <a:font script="Beng" typeface="Vrinda"/>
+        <a:font script="Gujr" typeface="Shruti"/>
+        <a:font script="Khmr" typeface="DaunPenh"/>
+        <a:font script="Knda" typeface="Tunga"/>
+        <a:font script="Guru" typeface="Raavi"/>
+        <a:font script="Cans" typeface="Euphemia"/>
+        <a:font script="Cher" typeface="Plantagenet Cherokee"/>
+        <a:font script="Yiii" typeface="Microsoft Yi Baiti"/>
+        <a:font script="Tibt" typeface="Microsoft Himalaya"/>
+        <a:font script="Thaa" typeface="MV Boli"/>
+        <a:font script="Deva" typeface="Mangal"/>
+        <a:font script="Telu" typeface="Gautami"/>
+        <a:font script="Taml" typeface="Latha"/>
+        <a:font script="Syrc" typeface="Estrangelo Edessa"/>
+        <a:font script="Orya" typeface="Kalinga"/>
+        <a:font script="Mlym" typeface="Kartika"/>
+        <a:font script="Laoo" typeface="DokChampa"/>
+        <a:font script="Sinh" typeface="Iskoola Pota"/>
+        <a:font script="Mong" typeface="Mongolian Baiti"/>
+        <a:font script="Viet" typeface="Arial"/>
+        <a:font script="Uigh" typeface="Microsoft Uighur"/>
+        <a:font script="Geor" typeface="Sylfaen"/>
+      </a:minorFont>
+    </a:fontScheme>
+    <a:fmtScheme name="Office">
+      <a:fillStyleLst>
+        <a:solidFill>
+          <a:schemeClr val="phClr"/>
+        </a:solidFill>
+        <a:gradFill rotWithShape="1">
+          <a:gsLst>
+            <a:gs pos="0">
+              <a:schemeClr val="phClr">
+                <a:lumMod val="110000"/>
+                <a:satMod val="105000"/>
+                <a:tint val="67000"/>
+              </a:schemeClr>
+            </a:gs>
+            <a:gs pos="50000">
+              <a:schemeClr val="phClr">
+                <a:lumMod val="105000"/>
+                <a:satMod val="103000"/>
+                <a:tint val="73000"/>
+              </a:schemeClr>
+            </a:gs>
+            <a:gs pos="100000">
+              <a:schemeClr val="phClr">
+                <a:lumMod val="105000"/>
+                <a:satMod val="109000"/>
+                <a:tint val="81000"/>
+              </a:schemeClr>
+            </a:gs>
+          </a:gsLst>
+          <a:lin ang="5400000" scaled="0"/>
+        </a:gradFill>
+        <a:gradFill rotWithShape="1">
+          <a:gsLst>
+            <a:gs pos="0">
+              <a:schemeClr val="phClr">
+                <a:satMod val="103000"/>
+                <a:lumMod val="102000"/>
+                <a:tint val="94000"/>
+              </a:schemeClr>
+            </a:gs>
+            <a:gs pos="50000">
+              <a:schemeClr val="phClr">
+                <a:satMod val="110000"/>
+                <a:lumMod val="100000"/>
+                <a:shade val="100000"/>
+              </a:schemeClr>
+            </a:gs>
+            <a:gs pos="100000">
+              <a:schemeClr val="phClr">
+                <a:lumMod val="99000"/>
+                <a:satMod val="120000"/>
+                <a:shade val="78000"/>
+              </a:schemeClr>
+            </a:gs>
+          </a:gsLst>
+          <a:lin ang="5400000" scaled="0"/>
+        </a:gradFill>
+      </a:fillStyleLst>
+      <a:lnStyleLst>
+        <a:ln w="6350" cap="flat" cmpd="sng" algn="ctr">
+          <a:solidFill>
+            <a:schemeClr val="phClr"/>
+          </a:solidFill>
+          <a:prstDash val="solid"/>
+          <a:miter lim="800000"/>
+        </a:ln>
+        <a:ln w="12700" cap="flat" cmpd="sng" algn="ctr">
+          <a:solidFill>
+            <a:schemeClr val="phClr"/>
+          </a:solidFill>
+          <a:prstDash val="solid"/>
+          <a:miter lim="800000"/>
+        </a:ln>
+        <a:ln w="19050" cap="flat" cmpd="sng" algn="ctr">
+          <a:solidFill>
+            <a:schemeClr val="phClr"/>
+          </a:solidFill>
+          <a:prstDash val="solid"/>
+          <a:miter lim="800000"/>
+        </a:ln>
+      </a:lnStyleLst>
+      <a:effectStyleLst>
+        <a:effectStyle>
+          <a:effectLst/>
+        </a:effectStyle>
+        <a:effectStyle>
+          <a:effectLst/>
+        </a:effectStyle>
+        <a:effectStyle>
+          <a:effectLst>
+            <a:outerShdw blurRad="57150" dist="19050" dir="5400000" algn="ctr" rotWithShape="0">
+              <a:srgbClr val="000000">
+                <a:alpha val="63000"/>
+              </a:srgbClr>
+            </a:outerShdw>
+          </a:effectLst>
+        </a:effectStyle>
+      </a:effectStyleLst>
+      <a:bgFillStyleLst>
+        <a:solidFill>
+          <a:schemeClr val="phClr"/>
+        </a:solidFill>
+        <a:solidFill>
+          <a:schemeClr val="phClr">
+            <a:tint val="95000"/>
+            <a:satMod val="170000"/>
+          </a:schemeClr>
+        </a:solidFill>
+        <a:gradFill rotWithShape="1">
+          <a:gsLst>
+            <a:gs pos="0">
+              <a:schemeClr val="phClr">
+                <a:tint val="93000"/>
+                <a:satMod val="150000"/>
+                <a:shade val="98000"/>
+                <a:lumMod val="102000"/>
+              </a:schemeClr>
+            </a:gs>
+            <a:gs pos="50000">
+              <a:schemeClr val="phClr">
+                <a:tint val="98000"/>
+                <a:satMod val="130000"/>
+                <a:shade val="90000"/>
+                <a:lumMod val="103000"/>
+              </a:schemeClr>
+            </a:gs>
+            <a:gs pos="100000">
+              <a:schemeClr val="phClr">
+                <a:shade val="63000"/>
+                <a:satMod val="120000"/>
+              </a:schemeClr>
+            </a:gs>
+          </a:gsLst>
+          <a:lin ang="5400000" scaled="0"/>
+        </a:gradFill>
+      </a:bgFillStyleLst>
+    </a:fmtScheme>
+  </a:themeElements>
+  <a:objectDefaults/>
+  <a:extraClrSchemeLst/>
+  <a:extLst>
+    <a:ext uri="{05A4C25C-085E-4340-85A3-A5531E510DB2}">
+      <thm15:themeFamily xmlns:thm15="http://schemas.microsoft.com/office/thememl/2012/main" name="Office Theme" id="{62F939B6-93AF-4DB8-9C6B-D6C7DFDC589F}" vid="{4A3C46E8-61CC-4603-A589-7422A47A8E4A}"/>
+    </a:ext>
+  </a:extLst>
+</a:theme>
 </file>